--- a/docs/presentations/开发测试协同知识沉淀方法论.pptx
+++ b/docs/presentations/开发测试协同知识沉淀方法论.pptx
@@ -875,30 +875,2260 @@
           <a:chExt cx="0" cy="0"/>
         </a:xfrm>
       </p:grpSpPr>
-      <p:pic>
-        <p:nvPicPr>
-          <p:cNvPr id="2" name="Image 0" descr="/Users/kaka/Desktop/intelligent-test-agent/docs/presentations/assets/开发测试协同知识沉淀方法论.png">    </p:cNvPr>
-          <p:cNvPicPr>
-            <a:picLocks noChangeAspect="1"/>
-          </p:cNvPicPr>
-          <p:nvPr/>
-        </p:nvPicPr>
-        <p:blipFill>
-          <a:blip r:embed="rId1"/>
-          <a:stretch>
-            <a:fillRect/>
-          </a:stretch>
-        </p:blipFill>
-        <p:spPr>
-          <a:xfrm>
-            <a:off x="0" y="0"/>
-            <a:ext cx="12192000" cy="6858000"/>
-          </a:xfrm>
-          <a:prstGeom prst="rect">
-            <a:avLst/>
-          </a:prstGeom>
-        </p:spPr>
-      </p:pic>
+      <p:sp>
+        <p:nvSpPr>
+          <p:cNvPr id="2" name="Shape 0"/>
+          <p:cNvSpPr/>
+          <p:nvPr/>
+        </p:nvSpPr>
+        <p:spPr>
+          <a:xfrm>
+            <a:off x="182880" y="173736"/>
+            <a:ext cx="146304" cy="841248"/>
+          </a:xfrm>
+          <a:prstGeom prst="rect">
+            <a:avLst/>
+          </a:prstGeom>
+          <a:solidFill>
+            <a:srgbClr val="C60024"/>
+          </a:solidFill>
+          <a:ln w="12700">
+            <a:solidFill>
+              <a:srgbClr val="C60024">
+                <a:alpha val="0"/>
+              </a:srgbClr>
+            </a:solidFill>
+            <a:prstDash val="solid"/>
+          </a:ln>
+        </p:spPr>
+      </p:sp>
+      <p:sp>
+        <p:nvSpPr>
+          <p:cNvPr id="3" name="Text 1"/>
+          <p:cNvSpPr/>
+          <p:nvPr/>
+        </p:nvSpPr>
+        <p:spPr>
+          <a:xfrm>
+            <a:off x="502920" y="201168"/>
+            <a:ext cx="6583680" cy="384048"/>
+          </a:xfrm>
+          <a:prstGeom prst="rect">
+            <a:avLst/>
+          </a:prstGeom>
+          <a:noFill/>
+          <a:ln/>
+        </p:spPr>
+        <p:txBody>
+          <a:bodyPr wrap="square" lIns="0" tIns="0" rIns="0" bIns="0" rtlCol="0" anchor="ctr"/>
+          <a:lstStyle/>
+          <a:p>
+            <a:pPr indent="0" marL="0">
+              <a:buNone/>
+            </a:pPr>
+            <a:r>
+              <a:rPr lang="en-US" sz="3000" b="1" dirty="0">
+                <a:solidFill>
+                  <a:srgbClr val="C60024"/>
+                </a:solidFill>
+                <a:latin typeface="Arial" pitchFamily="34" charset="0"/>
+                <a:ea typeface="Arial" pitchFamily="34" charset="-122"/>
+                <a:cs typeface="Arial" pitchFamily="34" charset="-120"/>
+              </a:rPr>
+              <a:t>开发测试协同的知识沉淀方法论</a:t>
+            </a:r>
+            <a:endParaRPr lang="en-US" sz="3000" dirty="0"/>
+          </a:p>
+        </p:txBody>
+      </p:sp>
+      <p:sp>
+        <p:nvSpPr>
+          <p:cNvPr id="4" name="Text 2"/>
+          <p:cNvSpPr/>
+          <p:nvPr/>
+        </p:nvSpPr>
+        <p:spPr>
+          <a:xfrm>
+            <a:off x="512064" y="758952"/>
+            <a:ext cx="11109960" cy="228600"/>
+          </a:xfrm>
+          <a:prstGeom prst="rect">
+            <a:avLst/>
+          </a:prstGeom>
+          <a:noFill/>
+          <a:ln/>
+        </p:spPr>
+        <p:txBody>
+          <a:bodyPr wrap="square" lIns="0" tIns="0" rIns="0" bIns="0" rtlCol="0" anchor="ctr"/>
+          <a:lstStyle/>
+          <a:p>
+            <a:pPr indent="0" marL="0">
+              <a:buNone/>
+            </a:pPr>
+            <a:r>
+              <a:rPr lang="en-US" sz="1160" dirty="0">
+                <a:solidFill>
+                  <a:srgbClr val="1E1E1E"/>
+                </a:solidFill>
+                <a:latin typeface="Arial" pitchFamily="34" charset="0"/>
+                <a:ea typeface="Arial" pitchFamily="34" charset="-122"/>
+                <a:cs typeface="Arial" pitchFamily="34" charset="-120"/>
+              </a:rPr>
+              <a:t>以应用级共享知识目录为底座，开发沉淀系统事实，测试深度参与功能与数据知识结构化，持续转化为可复用、可追溯的测试资产。</a:t>
+            </a:r>
+            <a:endParaRPr lang="en-US" sz="1160" dirty="0"/>
+          </a:p>
+        </p:txBody>
+      </p:sp>
+      <p:sp>
+        <p:nvSpPr>
+          <p:cNvPr id="5" name="Shape 3"/>
+          <p:cNvSpPr/>
+          <p:nvPr/>
+        </p:nvSpPr>
+        <p:spPr>
+          <a:xfrm>
+            <a:off x="164592" y="1170432"/>
+            <a:ext cx="5413248" cy="4837176"/>
+          </a:xfrm>
+          <a:prstGeom prst="roundRect">
+            <a:avLst>
+              <a:gd name="adj" fmla="val 1323"/>
+            </a:avLst>
+          </a:prstGeom>
+          <a:solidFill>
+            <a:srgbClr val="FFFFFF">
+              <a:alpha val="0"/>
+            </a:srgbClr>
+          </a:solidFill>
+          <a:ln w="10160">
+            <a:solidFill>
+              <a:srgbClr val="C9CDD3"/>
+            </a:solidFill>
+            <a:prstDash val="solid"/>
+          </a:ln>
+        </p:spPr>
+      </p:sp>
+      <p:sp>
+        <p:nvSpPr>
+          <p:cNvPr id="6" name="Shape 4"/>
+          <p:cNvSpPr/>
+          <p:nvPr/>
+        </p:nvSpPr>
+        <p:spPr>
+          <a:xfrm>
+            <a:off x="6355080" y="1170432"/>
+            <a:ext cx="5669280" cy="4837176"/>
+          </a:xfrm>
+          <a:prstGeom prst="roundRect">
+            <a:avLst>
+              <a:gd name="adj" fmla="val 1323"/>
+            </a:avLst>
+          </a:prstGeom>
+          <a:solidFill>
+            <a:srgbClr val="FFFFFF">
+              <a:alpha val="0"/>
+            </a:srgbClr>
+          </a:solidFill>
+          <a:ln w="10160">
+            <a:solidFill>
+              <a:srgbClr val="C9CDD3"/>
+            </a:solidFill>
+            <a:prstDash val="solid"/>
+          </a:ln>
+        </p:spPr>
+      </p:sp>
+      <p:sp>
+        <p:nvSpPr>
+          <p:cNvPr id="7" name="Shape 5"/>
+          <p:cNvSpPr/>
+          <p:nvPr/>
+        </p:nvSpPr>
+        <p:spPr>
+          <a:xfrm>
+            <a:off x="466344" y="1280160"/>
+            <a:ext cx="4828032" cy="384048"/>
+          </a:xfrm>
+          <a:prstGeom prst="roundRect">
+            <a:avLst>
+              <a:gd name="adj" fmla="val 14286"/>
+            </a:avLst>
+          </a:prstGeom>
+          <a:solidFill>
+            <a:srgbClr val="C60024"/>
+          </a:solidFill>
+          <a:ln w="12700">
+            <a:solidFill>
+              <a:srgbClr val="C60024">
+                <a:alpha val="0"/>
+              </a:srgbClr>
+            </a:solidFill>
+            <a:prstDash val="solid"/>
+          </a:ln>
+        </p:spPr>
+      </p:sp>
+      <p:sp>
+        <p:nvSpPr>
+          <p:cNvPr id="8" name="Shape 6"/>
+          <p:cNvSpPr/>
+          <p:nvPr/>
+        </p:nvSpPr>
+        <p:spPr>
+          <a:xfrm>
+            <a:off x="6656832" y="1280160"/>
+            <a:ext cx="5111496" cy="384048"/>
+          </a:xfrm>
+          <a:prstGeom prst="roundRect">
+            <a:avLst>
+              <a:gd name="adj" fmla="val 14286"/>
+            </a:avLst>
+          </a:prstGeom>
+          <a:solidFill>
+            <a:srgbClr val="C60024"/>
+          </a:solidFill>
+          <a:ln w="12700">
+            <a:solidFill>
+              <a:srgbClr val="C60024">
+                <a:alpha val="0"/>
+              </a:srgbClr>
+            </a:solidFill>
+            <a:prstDash val="solid"/>
+          </a:ln>
+        </p:spPr>
+      </p:sp>
+      <p:sp>
+        <p:nvSpPr>
+          <p:cNvPr id="9" name="Text 7"/>
+          <p:cNvSpPr/>
+          <p:nvPr/>
+        </p:nvSpPr>
+        <p:spPr>
+          <a:xfrm>
+            <a:off x="1371600" y="1362456"/>
+            <a:ext cx="2971800" cy="182880"/>
+          </a:xfrm>
+          <a:prstGeom prst="rect">
+            <a:avLst/>
+          </a:prstGeom>
+          <a:noFill/>
+          <a:ln/>
+        </p:spPr>
+        <p:txBody>
+          <a:bodyPr wrap="square" lIns="0" tIns="0" rIns="0" bIns="0" rtlCol="0" anchor="ctr"/>
+          <a:lstStyle/>
+          <a:p>
+            <a:pPr algn="ctr" indent="0" marL="0">
+              <a:buNone/>
+            </a:pPr>
+            <a:r>
+              <a:rPr lang="en-US" sz="1800" b="1" dirty="0">
+                <a:solidFill>
+                  <a:srgbClr val="FFFFFF"/>
+                </a:solidFill>
+                <a:latin typeface="Arial" pitchFamily="34" charset="0"/>
+                <a:ea typeface="Arial" pitchFamily="34" charset="-122"/>
+                <a:cs typeface="Arial" pitchFamily="34" charset="-120"/>
+              </a:rPr>
+              <a:t>应用级整合目录  docs/</a:t>
+            </a:r>
+            <a:endParaRPr lang="en-US" sz="1800" dirty="0"/>
+          </a:p>
+        </p:txBody>
+      </p:sp>
+      <p:sp>
+        <p:nvSpPr>
+          <p:cNvPr id="10" name="Text 8"/>
+          <p:cNvSpPr/>
+          <p:nvPr/>
+        </p:nvSpPr>
+        <p:spPr>
+          <a:xfrm>
+            <a:off x="8046720" y="1362456"/>
+            <a:ext cx="2359152" cy="182880"/>
+          </a:xfrm>
+          <a:prstGeom prst="rect">
+            <a:avLst/>
+          </a:prstGeom>
+          <a:noFill/>
+          <a:ln/>
+        </p:spPr>
+        <p:txBody>
+          <a:bodyPr wrap="square" lIns="0" tIns="0" rIns="0" bIns="0" rtlCol="0" anchor="ctr"/>
+          <a:lstStyle/>
+          <a:p>
+            <a:pPr algn="ctr" indent="0" marL="0">
+              <a:buNone/>
+            </a:pPr>
+            <a:r>
+              <a:rPr lang="en-US" sz="1800" b="1" dirty="0">
+                <a:solidFill>
+                  <a:srgbClr val="FFFFFF"/>
+                </a:solidFill>
+                <a:latin typeface="Arial" pitchFamily="34" charset="0"/>
+                <a:ea typeface="Arial" pitchFamily="34" charset="-122"/>
+                <a:cs typeface="Arial" pitchFamily="34" charset="-120"/>
+              </a:rPr>
+              <a:t>测试实际案例</a:t>
+            </a:r>
+            <a:endParaRPr lang="en-US" sz="1800" dirty="0"/>
+          </a:p>
+        </p:txBody>
+      </p:sp>
+      <p:sp>
+        <p:nvSpPr>
+          <p:cNvPr id="11" name="Shape 9"/>
+          <p:cNvSpPr/>
+          <p:nvPr/>
+        </p:nvSpPr>
+        <p:spPr>
+          <a:xfrm>
+            <a:off x="649224" y="1865376"/>
+            <a:ext cx="146304" cy="73152"/>
+          </a:xfrm>
+          <a:prstGeom prst="rect">
+            <a:avLst/>
+          </a:prstGeom>
+          <a:solidFill>
+            <a:srgbClr val="FFFFFF">
+              <a:alpha val="0"/>
+            </a:srgbClr>
+          </a:solidFill>
+          <a:ln w="13970">
+            <a:solidFill>
+              <a:srgbClr val="C60024"/>
+            </a:solidFill>
+            <a:prstDash val="solid"/>
+          </a:ln>
+        </p:spPr>
+      </p:sp>
+      <p:sp>
+        <p:nvSpPr>
+          <p:cNvPr id="12" name="Shape 10"/>
+          <p:cNvSpPr/>
+          <p:nvPr/>
+        </p:nvSpPr>
+        <p:spPr>
+          <a:xfrm>
+            <a:off x="612648" y="1920240"/>
+            <a:ext cx="310896" cy="182880"/>
+          </a:xfrm>
+          <a:prstGeom prst="roundRect">
+            <a:avLst>
+              <a:gd name="adj" fmla="val 15000"/>
+            </a:avLst>
+          </a:prstGeom>
+          <a:solidFill>
+            <a:srgbClr val="FFFFFF">
+              <a:alpha val="0"/>
+            </a:srgbClr>
+          </a:solidFill>
+          <a:ln w="13970">
+            <a:solidFill>
+              <a:srgbClr val="C60024"/>
+            </a:solidFill>
+            <a:prstDash val="solid"/>
+          </a:ln>
+        </p:spPr>
+      </p:sp>
+      <p:sp>
+        <p:nvSpPr>
+          <p:cNvPr id="13" name="Text 11"/>
+          <p:cNvSpPr/>
+          <p:nvPr/>
+        </p:nvSpPr>
+        <p:spPr>
+          <a:xfrm>
+            <a:off x="1088136" y="1847088"/>
+            <a:ext cx="146304" cy="201168"/>
+          </a:xfrm>
+          <a:prstGeom prst="rect">
+            <a:avLst/>
+          </a:prstGeom>
+          <a:noFill/>
+          <a:ln/>
+        </p:spPr>
+        <p:txBody>
+          <a:bodyPr wrap="square" lIns="0" tIns="0" rIns="0" bIns="0" rtlCol="0" anchor="ctr"/>
+          <a:lstStyle/>
+          <a:p>
+            <a:pPr indent="0" marL="0">
+              <a:buNone/>
+            </a:pPr>
+            <a:r>
+              <a:rPr lang="en-US" sz="1500" b="1" dirty="0">
+                <a:solidFill>
+                  <a:srgbClr val="C60024"/>
+                </a:solidFill>
+                <a:latin typeface="Arial" pitchFamily="34" charset="0"/>
+                <a:ea typeface="Arial" pitchFamily="34" charset="-122"/>
+                <a:cs typeface="Arial" pitchFamily="34" charset="-120"/>
+              </a:rPr>
+              <a:t>*</a:t>
+            </a:r>
+            <a:endParaRPr lang="en-US" sz="1500" dirty="0"/>
+          </a:p>
+        </p:txBody>
+      </p:sp>
+      <p:sp>
+        <p:nvSpPr>
+          <p:cNvPr id="14" name="Text 12"/>
+          <p:cNvSpPr/>
+          <p:nvPr/>
+        </p:nvSpPr>
+        <p:spPr>
+          <a:xfrm>
+            <a:off x="1298448" y="1847088"/>
+            <a:ext cx="2103120" cy="219456"/>
+          </a:xfrm>
+          <a:prstGeom prst="rect">
+            <a:avLst/>
+          </a:prstGeom>
+          <a:noFill/>
+          <a:ln/>
+        </p:spPr>
+        <p:txBody>
+          <a:bodyPr wrap="square" lIns="0" tIns="0" rIns="0" bIns="0" rtlCol="0" anchor="ctr"/>
+          <a:lstStyle/>
+          <a:p>
+            <a:pPr indent="0" marL="0">
+              <a:buNone/>
+            </a:pPr>
+            <a:r>
+              <a:rPr lang="en-US" sz="1450" b="1" dirty="0">
+                <a:solidFill>
+                  <a:srgbClr val="1E1E1E"/>
+                </a:solidFill>
+                <a:latin typeface="Arial" pitchFamily="34" charset="0"/>
+                <a:ea typeface="Arial" pitchFamily="34" charset="-122"/>
+                <a:cs typeface="Arial" pitchFamily="34" charset="-120"/>
+              </a:rPr>
+              <a:t>应用架构/</a:t>
+            </a:r>
+            <a:endParaRPr lang="en-US" sz="1450" dirty="0"/>
+          </a:p>
+        </p:txBody>
+      </p:sp>
+      <p:sp>
+        <p:nvSpPr>
+          <p:cNvPr id="15" name="Shape 13"/>
+          <p:cNvSpPr/>
+          <p:nvPr/>
+        </p:nvSpPr>
+        <p:spPr>
+          <a:xfrm>
+            <a:off x="1252728" y="2084832"/>
+            <a:ext cx="914" cy="310896"/>
+          </a:xfrm>
+          <a:prstGeom prst="line">
+            <a:avLst/>
+          </a:prstGeom>
+          <a:noFill/>
+          <a:ln w="10160">
+            <a:solidFill>
+              <a:srgbClr val="8F969D"/>
+            </a:solidFill>
+            <a:prstDash val="solid"/>
+          </a:ln>
+        </p:spPr>
+      </p:sp>
+      <p:sp>
+        <p:nvSpPr>
+          <p:cNvPr id="16" name="Shape 14"/>
+          <p:cNvSpPr/>
+          <p:nvPr/>
+        </p:nvSpPr>
+        <p:spPr>
+          <a:xfrm>
+            <a:off x="1252728" y="2185416"/>
+            <a:ext cx="164592" cy="914"/>
+          </a:xfrm>
+          <a:prstGeom prst="line">
+            <a:avLst/>
+          </a:prstGeom>
+          <a:noFill/>
+          <a:ln w="10160">
+            <a:solidFill>
+              <a:srgbClr val="8F969D"/>
+            </a:solidFill>
+            <a:prstDash val="solid"/>
+          </a:ln>
+        </p:spPr>
+      </p:sp>
+      <p:sp>
+        <p:nvSpPr>
+          <p:cNvPr id="17" name="Shape 15"/>
+          <p:cNvSpPr/>
+          <p:nvPr/>
+        </p:nvSpPr>
+        <p:spPr>
+          <a:xfrm>
+            <a:off x="1252728" y="2395728"/>
+            <a:ext cx="164592" cy="914"/>
+          </a:xfrm>
+          <a:prstGeom prst="line">
+            <a:avLst/>
+          </a:prstGeom>
+          <a:noFill/>
+          <a:ln w="10160">
+            <a:solidFill>
+              <a:srgbClr val="8F969D"/>
+            </a:solidFill>
+            <a:prstDash val="solid"/>
+          </a:ln>
+        </p:spPr>
+      </p:sp>
+      <p:sp>
+        <p:nvSpPr>
+          <p:cNvPr id="18" name="Text 16"/>
+          <p:cNvSpPr/>
+          <p:nvPr/>
+        </p:nvSpPr>
+        <p:spPr>
+          <a:xfrm>
+            <a:off x="1572768" y="2130552"/>
+            <a:ext cx="3712464" cy="164592"/>
+          </a:xfrm>
+          <a:prstGeom prst="rect">
+            <a:avLst/>
+          </a:prstGeom>
+          <a:noFill/>
+          <a:ln/>
+        </p:spPr>
+        <p:txBody>
+          <a:bodyPr wrap="square" lIns="0" tIns="0" rIns="0" bIns="0" rtlCol="0" anchor="ctr"/>
+          <a:lstStyle/>
+          <a:p>
+            <a:pPr indent="0" marL="0">
+              <a:buNone/>
+            </a:pPr>
+            <a:r>
+              <a:rPr lang="en-US" sz="1150" dirty="0">
+                <a:solidFill>
+                  <a:srgbClr val="1F4E79"/>
+                </a:solidFill>
+                <a:latin typeface="Arial" pitchFamily="34" charset="0"/>
+                <a:ea typeface="Arial" pitchFamily="34" charset="-122"/>
+                <a:cs typeface="Arial" pitchFamily="34" charset="-120"/>
+              </a:rPr>
+              <a:t>应用架构.md</a:t>
+            </a:r>
+            <a:endParaRPr lang="en-US" sz="1150" dirty="0"/>
+          </a:p>
+        </p:txBody>
+      </p:sp>
+      <p:sp>
+        <p:nvSpPr>
+          <p:cNvPr id="19" name="Text 17"/>
+          <p:cNvSpPr/>
+          <p:nvPr/>
+        </p:nvSpPr>
+        <p:spPr>
+          <a:xfrm>
+            <a:off x="1572768" y="2340864"/>
+            <a:ext cx="3712464" cy="164592"/>
+          </a:xfrm>
+          <a:prstGeom prst="rect">
+            <a:avLst/>
+          </a:prstGeom>
+          <a:noFill/>
+          <a:ln/>
+        </p:spPr>
+        <p:txBody>
+          <a:bodyPr wrap="square" lIns="0" tIns="0" rIns="0" bIns="0" rtlCol="0" anchor="ctr"/>
+          <a:lstStyle/>
+          <a:p>
+            <a:pPr indent="0" marL="0">
+              <a:buNone/>
+            </a:pPr>
+            <a:r>
+              <a:rPr lang="en-US" sz="1150" dirty="0">
+                <a:solidFill>
+                  <a:srgbClr val="1E1E1E"/>
+                </a:solidFill>
+                <a:latin typeface="Arial" pitchFamily="34" charset="0"/>
+                <a:ea typeface="Arial" pitchFamily="34" charset="-122"/>
+                <a:cs typeface="Arial" pitchFamily="34" charset="-120"/>
+              </a:rPr>
+              <a:t>应用场景说明书_XXX.md</a:t>
+            </a:r>
+            <a:endParaRPr lang="en-US" sz="1150" dirty="0"/>
+          </a:p>
+        </p:txBody>
+      </p:sp>
+      <p:sp>
+        <p:nvSpPr>
+          <p:cNvPr id="20" name="Shape 18"/>
+          <p:cNvSpPr/>
+          <p:nvPr/>
+        </p:nvSpPr>
+        <p:spPr>
+          <a:xfrm>
+            <a:off x="649224" y="2688336"/>
+            <a:ext cx="146304" cy="73152"/>
+          </a:xfrm>
+          <a:prstGeom prst="rect">
+            <a:avLst/>
+          </a:prstGeom>
+          <a:solidFill>
+            <a:srgbClr val="FFFFFF">
+              <a:alpha val="0"/>
+            </a:srgbClr>
+          </a:solidFill>
+          <a:ln w="13970">
+            <a:solidFill>
+              <a:srgbClr val="C60024"/>
+            </a:solidFill>
+            <a:prstDash val="solid"/>
+          </a:ln>
+        </p:spPr>
+      </p:sp>
+      <p:sp>
+        <p:nvSpPr>
+          <p:cNvPr id="21" name="Shape 19"/>
+          <p:cNvSpPr/>
+          <p:nvPr/>
+        </p:nvSpPr>
+        <p:spPr>
+          <a:xfrm>
+            <a:off x="612648" y="2743200"/>
+            <a:ext cx="310896" cy="182880"/>
+          </a:xfrm>
+          <a:prstGeom prst="roundRect">
+            <a:avLst>
+              <a:gd name="adj" fmla="val 15000"/>
+            </a:avLst>
+          </a:prstGeom>
+          <a:solidFill>
+            <a:srgbClr val="FFFFFF">
+              <a:alpha val="0"/>
+            </a:srgbClr>
+          </a:solidFill>
+          <a:ln w="13970">
+            <a:solidFill>
+              <a:srgbClr val="C60024"/>
+            </a:solidFill>
+            <a:prstDash val="solid"/>
+          </a:ln>
+        </p:spPr>
+      </p:sp>
+      <p:sp>
+        <p:nvSpPr>
+          <p:cNvPr id="22" name="Text 20"/>
+          <p:cNvSpPr/>
+          <p:nvPr/>
+        </p:nvSpPr>
+        <p:spPr>
+          <a:xfrm>
+            <a:off x="1088136" y="2670048"/>
+            <a:ext cx="2103120" cy="219456"/>
+          </a:xfrm>
+          <a:prstGeom prst="rect">
+            <a:avLst/>
+          </a:prstGeom>
+          <a:noFill/>
+          <a:ln/>
+        </p:spPr>
+        <p:txBody>
+          <a:bodyPr wrap="square" lIns="0" tIns="0" rIns="0" bIns="0" rtlCol="0" anchor="ctr"/>
+          <a:lstStyle/>
+          <a:p>
+            <a:pPr indent="0" marL="0">
+              <a:buNone/>
+            </a:pPr>
+            <a:r>
+              <a:rPr lang="en-US" sz="1450" b="1" dirty="0">
+                <a:solidFill>
+                  <a:srgbClr val="1F4E79"/>
+                </a:solidFill>
+                <a:latin typeface="Arial" pitchFamily="34" charset="0"/>
+                <a:ea typeface="Arial" pitchFamily="34" charset="-122"/>
+                <a:cs typeface="Arial" pitchFamily="34" charset="-120"/>
+              </a:rPr>
+              <a:t>技术架构/</a:t>
+            </a:r>
+            <a:endParaRPr lang="en-US" sz="1450" dirty="0"/>
+          </a:p>
+        </p:txBody>
+      </p:sp>
+      <p:sp>
+        <p:nvSpPr>
+          <p:cNvPr id="23" name="Shape 21"/>
+          <p:cNvSpPr/>
+          <p:nvPr/>
+        </p:nvSpPr>
+        <p:spPr>
+          <a:xfrm>
+            <a:off x="1252728" y="2907792"/>
+            <a:ext cx="914" cy="109728"/>
+          </a:xfrm>
+          <a:prstGeom prst="line">
+            <a:avLst/>
+          </a:prstGeom>
+          <a:noFill/>
+          <a:ln w="10160">
+            <a:solidFill>
+              <a:srgbClr val="8F969D"/>
+            </a:solidFill>
+            <a:prstDash val="solid"/>
+          </a:ln>
+        </p:spPr>
+      </p:sp>
+      <p:sp>
+        <p:nvSpPr>
+          <p:cNvPr id="24" name="Shape 22"/>
+          <p:cNvSpPr/>
+          <p:nvPr/>
+        </p:nvSpPr>
+        <p:spPr>
+          <a:xfrm>
+            <a:off x="1252728" y="3017520"/>
+            <a:ext cx="164592" cy="914"/>
+          </a:xfrm>
+          <a:prstGeom prst="line">
+            <a:avLst/>
+          </a:prstGeom>
+          <a:noFill/>
+          <a:ln w="10160">
+            <a:solidFill>
+              <a:srgbClr val="8F969D"/>
+            </a:solidFill>
+            <a:prstDash val="solid"/>
+          </a:ln>
+        </p:spPr>
+      </p:sp>
+      <p:sp>
+        <p:nvSpPr>
+          <p:cNvPr id="25" name="Text 23"/>
+          <p:cNvSpPr/>
+          <p:nvPr/>
+        </p:nvSpPr>
+        <p:spPr>
+          <a:xfrm>
+            <a:off x="1572768" y="2962656"/>
+            <a:ext cx="3712464" cy="164592"/>
+          </a:xfrm>
+          <a:prstGeom prst="rect">
+            <a:avLst/>
+          </a:prstGeom>
+          <a:noFill/>
+          <a:ln/>
+        </p:spPr>
+        <p:txBody>
+          <a:bodyPr wrap="square" lIns="0" tIns="0" rIns="0" bIns="0" rtlCol="0" anchor="ctr"/>
+          <a:lstStyle/>
+          <a:p>
+            <a:pPr indent="0" marL="0">
+              <a:buNone/>
+            </a:pPr>
+            <a:r>
+              <a:rPr lang="en-US" sz="1150" dirty="0">
+                <a:solidFill>
+                  <a:srgbClr val="1F4E79"/>
+                </a:solidFill>
+                <a:latin typeface="Arial" pitchFamily="34" charset="0"/>
+                <a:ea typeface="Arial" pitchFamily="34" charset="-122"/>
+                <a:cs typeface="Arial" pitchFamily="34" charset="-120"/>
+              </a:rPr>
+              <a:t>工程概览_A/B.md</a:t>
+            </a:r>
+            <a:endParaRPr lang="en-US" sz="1150" dirty="0"/>
+          </a:p>
+        </p:txBody>
+      </p:sp>
+      <p:sp>
+        <p:nvSpPr>
+          <p:cNvPr id="26" name="Shape 24"/>
+          <p:cNvSpPr/>
+          <p:nvPr/>
+        </p:nvSpPr>
+        <p:spPr>
+          <a:xfrm>
+            <a:off x="649224" y="3255264"/>
+            <a:ext cx="146304" cy="73152"/>
+          </a:xfrm>
+          <a:prstGeom prst="rect">
+            <a:avLst/>
+          </a:prstGeom>
+          <a:solidFill>
+            <a:srgbClr val="FFFFFF">
+              <a:alpha val="0"/>
+            </a:srgbClr>
+          </a:solidFill>
+          <a:ln w="13970">
+            <a:solidFill>
+              <a:srgbClr val="C60024"/>
+            </a:solidFill>
+            <a:prstDash val="solid"/>
+          </a:ln>
+        </p:spPr>
+      </p:sp>
+      <p:sp>
+        <p:nvSpPr>
+          <p:cNvPr id="27" name="Shape 25"/>
+          <p:cNvSpPr/>
+          <p:nvPr/>
+        </p:nvSpPr>
+        <p:spPr>
+          <a:xfrm>
+            <a:off x="612648" y="3310128"/>
+            <a:ext cx="310896" cy="182880"/>
+          </a:xfrm>
+          <a:prstGeom prst="roundRect">
+            <a:avLst>
+              <a:gd name="adj" fmla="val 15000"/>
+            </a:avLst>
+          </a:prstGeom>
+          <a:solidFill>
+            <a:srgbClr val="FFFFFF">
+              <a:alpha val="0"/>
+            </a:srgbClr>
+          </a:solidFill>
+          <a:ln w="13970">
+            <a:solidFill>
+              <a:srgbClr val="C60024"/>
+            </a:solidFill>
+            <a:prstDash val="solid"/>
+          </a:ln>
+        </p:spPr>
+      </p:sp>
+      <p:sp>
+        <p:nvSpPr>
+          <p:cNvPr id="28" name="Text 26"/>
+          <p:cNvSpPr/>
+          <p:nvPr/>
+        </p:nvSpPr>
+        <p:spPr>
+          <a:xfrm>
+            <a:off x="1088136" y="3236976"/>
+            <a:ext cx="146304" cy="201168"/>
+          </a:xfrm>
+          <a:prstGeom prst="rect">
+            <a:avLst/>
+          </a:prstGeom>
+          <a:noFill/>
+          <a:ln/>
+        </p:spPr>
+        <p:txBody>
+          <a:bodyPr wrap="square" lIns="0" tIns="0" rIns="0" bIns="0" rtlCol="0" anchor="ctr"/>
+          <a:lstStyle/>
+          <a:p>
+            <a:pPr indent="0" marL="0">
+              <a:buNone/>
+            </a:pPr>
+            <a:r>
+              <a:rPr lang="en-US" sz="1500" b="1" dirty="0">
+                <a:solidFill>
+                  <a:srgbClr val="C60024"/>
+                </a:solidFill>
+                <a:latin typeface="Arial" pitchFamily="34" charset="0"/>
+                <a:ea typeface="Arial" pitchFamily="34" charset="-122"/>
+                <a:cs typeface="Arial" pitchFamily="34" charset="-120"/>
+              </a:rPr>
+              <a:t>*</a:t>
+            </a:r>
+            <a:endParaRPr lang="en-US" sz="1500" dirty="0"/>
+          </a:p>
+        </p:txBody>
+      </p:sp>
+      <p:sp>
+        <p:nvSpPr>
+          <p:cNvPr id="29" name="Text 27"/>
+          <p:cNvSpPr/>
+          <p:nvPr/>
+        </p:nvSpPr>
+        <p:spPr>
+          <a:xfrm>
+            <a:off x="1298448" y="3236976"/>
+            <a:ext cx="2103120" cy="219456"/>
+          </a:xfrm>
+          <a:prstGeom prst="rect">
+            <a:avLst/>
+          </a:prstGeom>
+          <a:noFill/>
+          <a:ln/>
+        </p:spPr>
+        <p:txBody>
+          <a:bodyPr wrap="square" lIns="0" tIns="0" rIns="0" bIns="0" rtlCol="0" anchor="ctr"/>
+          <a:lstStyle/>
+          <a:p>
+            <a:pPr indent="0" marL="0">
+              <a:buNone/>
+            </a:pPr>
+            <a:r>
+              <a:rPr lang="en-US" sz="1450" b="1" dirty="0">
+                <a:solidFill>
+                  <a:srgbClr val="1E1E1E"/>
+                </a:solidFill>
+                <a:latin typeface="Arial" pitchFamily="34" charset="0"/>
+                <a:ea typeface="Arial" pitchFamily="34" charset="-122"/>
+                <a:cs typeface="Arial" pitchFamily="34" charset="-120"/>
+              </a:rPr>
+              <a:t>功能模块/</a:t>
+            </a:r>
+            <a:endParaRPr lang="en-US" sz="1450" dirty="0"/>
+          </a:p>
+        </p:txBody>
+      </p:sp>
+      <p:sp>
+        <p:nvSpPr>
+          <p:cNvPr id="30" name="Text 28"/>
+          <p:cNvSpPr/>
+          <p:nvPr/>
+        </p:nvSpPr>
+        <p:spPr>
+          <a:xfrm>
+            <a:off x="2468880" y="3227832"/>
+            <a:ext cx="201168" cy="228600"/>
+          </a:xfrm>
+          <a:prstGeom prst="rect">
+            <a:avLst/>
+          </a:prstGeom>
+          <a:noFill/>
+          <a:ln/>
+        </p:spPr>
+        <p:txBody>
+          <a:bodyPr wrap="square" lIns="0" tIns="0" rIns="0" bIns="0" rtlCol="0" anchor="ctr"/>
+          <a:lstStyle/>
+          <a:p>
+            <a:pPr indent="0" marL="0">
+              <a:buNone/>
+            </a:pPr>
+            <a:r>
+              <a:rPr lang="en-US" sz="1600" dirty="0">
+                <a:solidFill>
+                  <a:srgbClr val="C69C3C"/>
+                </a:solidFill>
+                <a:latin typeface="Arial" pitchFamily="34" charset="0"/>
+                <a:ea typeface="Arial" pitchFamily="34" charset="-122"/>
+                <a:cs typeface="Arial" pitchFamily="34" charset="-120"/>
+              </a:rPr>
+              <a:t>★</a:t>
+            </a:r>
+            <a:endParaRPr lang="en-US" sz="1600" dirty="0"/>
+          </a:p>
+        </p:txBody>
+      </p:sp>
+      <p:sp>
+        <p:nvSpPr>
+          <p:cNvPr id="31" name="Shape 29"/>
+          <p:cNvSpPr/>
+          <p:nvPr/>
+        </p:nvSpPr>
+        <p:spPr>
+          <a:xfrm>
+            <a:off x="1252728" y="3474720"/>
+            <a:ext cx="914" cy="539496"/>
+          </a:xfrm>
+          <a:prstGeom prst="line">
+            <a:avLst/>
+          </a:prstGeom>
+          <a:noFill/>
+          <a:ln w="10160">
+            <a:solidFill>
+              <a:srgbClr val="8F969D"/>
+            </a:solidFill>
+            <a:prstDash val="solid"/>
+          </a:ln>
+        </p:spPr>
+      </p:sp>
+      <p:sp>
+        <p:nvSpPr>
+          <p:cNvPr id="32" name="Shape 30"/>
+          <p:cNvSpPr/>
+          <p:nvPr/>
+        </p:nvSpPr>
+        <p:spPr>
+          <a:xfrm>
+            <a:off x="1252728" y="3575304"/>
+            <a:ext cx="164592" cy="914"/>
+          </a:xfrm>
+          <a:prstGeom prst="line">
+            <a:avLst/>
+          </a:prstGeom>
+          <a:noFill/>
+          <a:ln w="10160">
+            <a:solidFill>
+              <a:srgbClr val="8F969D"/>
+            </a:solidFill>
+            <a:prstDash val="solid"/>
+          </a:ln>
+        </p:spPr>
+      </p:sp>
+      <p:sp>
+        <p:nvSpPr>
+          <p:cNvPr id="33" name="Shape 31"/>
+          <p:cNvSpPr/>
+          <p:nvPr/>
+        </p:nvSpPr>
+        <p:spPr>
+          <a:xfrm>
+            <a:off x="1252728" y="3794760"/>
+            <a:ext cx="164592" cy="914"/>
+          </a:xfrm>
+          <a:prstGeom prst="line">
+            <a:avLst/>
+          </a:prstGeom>
+          <a:noFill/>
+          <a:ln w="10160">
+            <a:solidFill>
+              <a:srgbClr val="8F969D"/>
+            </a:solidFill>
+            <a:prstDash val="solid"/>
+          </a:ln>
+        </p:spPr>
+      </p:sp>
+      <p:sp>
+        <p:nvSpPr>
+          <p:cNvPr id="34" name="Shape 32"/>
+          <p:cNvSpPr/>
+          <p:nvPr/>
+        </p:nvSpPr>
+        <p:spPr>
+          <a:xfrm>
+            <a:off x="1252728" y="4014216"/>
+            <a:ext cx="164592" cy="914"/>
+          </a:xfrm>
+          <a:prstGeom prst="line">
+            <a:avLst/>
+          </a:prstGeom>
+          <a:noFill/>
+          <a:ln w="10160">
+            <a:solidFill>
+              <a:srgbClr val="8F969D"/>
+            </a:solidFill>
+            <a:prstDash val="solid"/>
+          </a:ln>
+        </p:spPr>
+      </p:sp>
+      <p:sp>
+        <p:nvSpPr>
+          <p:cNvPr id="35" name="Text 33"/>
+          <p:cNvSpPr/>
+          <p:nvPr/>
+        </p:nvSpPr>
+        <p:spPr>
+          <a:xfrm>
+            <a:off x="1572768" y="3520440"/>
+            <a:ext cx="3712464" cy="164592"/>
+          </a:xfrm>
+          <a:prstGeom prst="rect">
+            <a:avLst/>
+          </a:prstGeom>
+          <a:noFill/>
+          <a:ln/>
+        </p:spPr>
+        <p:txBody>
+          <a:bodyPr wrap="square" lIns="0" tIns="0" rIns="0" bIns="0" rtlCol="0" anchor="ctr"/>
+          <a:lstStyle/>
+          <a:p>
+            <a:pPr indent="0" marL="0">
+              <a:buNone/>
+            </a:pPr>
+            <a:r>
+              <a:rPr lang="en-US" sz="1150" dirty="0">
+                <a:solidFill>
+                  <a:srgbClr val="1F4E79"/>
+                </a:solidFill>
+                <a:latin typeface="Arial" pitchFamily="34" charset="0"/>
+                <a:ea typeface="Arial" pitchFamily="34" charset="-122"/>
+                <a:cs typeface="Arial" pitchFamily="34" charset="-120"/>
+              </a:rPr>
+              <a:t>功能模块_XXX.md</a:t>
+            </a:r>
+            <a:endParaRPr lang="en-US" sz="1150" dirty="0"/>
+          </a:p>
+        </p:txBody>
+      </p:sp>
+      <p:sp>
+        <p:nvSpPr>
+          <p:cNvPr id="36" name="Text 34"/>
+          <p:cNvSpPr/>
+          <p:nvPr/>
+        </p:nvSpPr>
+        <p:spPr>
+          <a:xfrm>
+            <a:off x="1572768" y="3739896"/>
+            <a:ext cx="3712464" cy="164592"/>
+          </a:xfrm>
+          <a:prstGeom prst="rect">
+            <a:avLst/>
+          </a:prstGeom>
+          <a:noFill/>
+          <a:ln/>
+        </p:spPr>
+        <p:txBody>
+          <a:bodyPr wrap="square" lIns="0" tIns="0" rIns="0" bIns="0" rtlCol="0" anchor="ctr"/>
+          <a:lstStyle/>
+          <a:p>
+            <a:pPr indent="0" marL="0">
+              <a:buNone/>
+            </a:pPr>
+            <a:r>
+              <a:rPr lang="en-US" sz="1150" dirty="0">
+                <a:solidFill>
+                  <a:srgbClr val="1E1E1E"/>
+                </a:solidFill>
+                <a:latin typeface="Arial" pitchFamily="34" charset="0"/>
+                <a:ea typeface="Arial" pitchFamily="34" charset="-122"/>
+                <a:cs typeface="Arial" pitchFamily="34" charset="-120"/>
+              </a:rPr>
+              <a:t>测试设计文档_X1.md</a:t>
+            </a:r>
+            <a:endParaRPr lang="en-US" sz="1150" dirty="0"/>
+          </a:p>
+        </p:txBody>
+      </p:sp>
+      <p:sp>
+        <p:nvSpPr>
+          <p:cNvPr id="37" name="Text 35"/>
+          <p:cNvSpPr/>
+          <p:nvPr/>
+        </p:nvSpPr>
+        <p:spPr>
+          <a:xfrm>
+            <a:off x="1572768" y="3959352"/>
+            <a:ext cx="3712464" cy="164592"/>
+          </a:xfrm>
+          <a:prstGeom prst="rect">
+            <a:avLst/>
+          </a:prstGeom>
+          <a:noFill/>
+          <a:ln/>
+        </p:spPr>
+        <p:txBody>
+          <a:bodyPr wrap="square" lIns="0" tIns="0" rIns="0" bIns="0" rtlCol="0" anchor="ctr"/>
+          <a:lstStyle/>
+          <a:p>
+            <a:pPr indent="0" marL="0">
+              <a:buNone/>
+            </a:pPr>
+            <a:r>
+              <a:rPr lang="en-US" sz="1150" dirty="0">
+                <a:solidFill>
+                  <a:srgbClr val="1E1E1E"/>
+                </a:solidFill>
+                <a:latin typeface="Arial" pitchFamily="34" charset="0"/>
+                <a:ea typeface="Arial" pitchFamily="34" charset="-122"/>
+                <a:cs typeface="Arial" pitchFamily="34" charset="-120"/>
+              </a:rPr>
+              <a:t>测试案例_X1.md</a:t>
+            </a:r>
+            <a:endParaRPr lang="en-US" sz="1150" dirty="0"/>
+          </a:p>
+        </p:txBody>
+      </p:sp>
+      <p:sp>
+        <p:nvSpPr>
+          <p:cNvPr id="38" name="Shape 36"/>
+          <p:cNvSpPr/>
+          <p:nvPr/>
+        </p:nvSpPr>
+        <p:spPr>
+          <a:xfrm>
+            <a:off x="649224" y="4261104"/>
+            <a:ext cx="146304" cy="73152"/>
+          </a:xfrm>
+          <a:prstGeom prst="rect">
+            <a:avLst/>
+          </a:prstGeom>
+          <a:solidFill>
+            <a:srgbClr val="FFFFFF">
+              <a:alpha val="0"/>
+            </a:srgbClr>
+          </a:solidFill>
+          <a:ln w="13970">
+            <a:solidFill>
+              <a:srgbClr val="C60024"/>
+            </a:solidFill>
+            <a:prstDash val="solid"/>
+          </a:ln>
+        </p:spPr>
+      </p:sp>
+      <p:sp>
+        <p:nvSpPr>
+          <p:cNvPr id="39" name="Shape 37"/>
+          <p:cNvSpPr/>
+          <p:nvPr/>
+        </p:nvSpPr>
+        <p:spPr>
+          <a:xfrm>
+            <a:off x="612648" y="4315968"/>
+            <a:ext cx="310896" cy="182880"/>
+          </a:xfrm>
+          <a:prstGeom prst="roundRect">
+            <a:avLst>
+              <a:gd name="adj" fmla="val 15000"/>
+            </a:avLst>
+          </a:prstGeom>
+          <a:solidFill>
+            <a:srgbClr val="FFFFFF">
+              <a:alpha val="0"/>
+            </a:srgbClr>
+          </a:solidFill>
+          <a:ln w="13970">
+            <a:solidFill>
+              <a:srgbClr val="C60024"/>
+            </a:solidFill>
+            <a:prstDash val="solid"/>
+          </a:ln>
+        </p:spPr>
+      </p:sp>
+      <p:sp>
+        <p:nvSpPr>
+          <p:cNvPr id="40" name="Text 38"/>
+          <p:cNvSpPr/>
+          <p:nvPr/>
+        </p:nvSpPr>
+        <p:spPr>
+          <a:xfrm>
+            <a:off x="1088136" y="4242816"/>
+            <a:ext cx="2103120" cy="219456"/>
+          </a:xfrm>
+          <a:prstGeom prst="rect">
+            <a:avLst/>
+          </a:prstGeom>
+          <a:noFill/>
+          <a:ln/>
+        </p:spPr>
+        <p:txBody>
+          <a:bodyPr wrap="square" lIns="0" tIns="0" rIns="0" bIns="0" rtlCol="0" anchor="ctr"/>
+          <a:lstStyle/>
+          <a:p>
+            <a:pPr indent="0" marL="0">
+              <a:buNone/>
+            </a:pPr>
+            <a:r>
+              <a:rPr lang="en-US" sz="1450" b="1" dirty="0">
+                <a:solidFill>
+                  <a:srgbClr val="1F4E79"/>
+                </a:solidFill>
+                <a:latin typeface="Arial" pitchFamily="34" charset="0"/>
+                <a:ea typeface="Arial" pitchFamily="34" charset="-122"/>
+                <a:cs typeface="Arial" pitchFamily="34" charset="-120"/>
+              </a:rPr>
+              <a:t>功能文档/</a:t>
+            </a:r>
+            <a:endParaRPr lang="en-US" sz="1450" dirty="0"/>
+          </a:p>
+        </p:txBody>
+      </p:sp>
+      <p:sp>
+        <p:nvSpPr>
+          <p:cNvPr id="41" name="Shape 39"/>
+          <p:cNvSpPr/>
+          <p:nvPr/>
+        </p:nvSpPr>
+        <p:spPr>
+          <a:xfrm>
+            <a:off x="1252728" y="4480560"/>
+            <a:ext cx="914" cy="109728"/>
+          </a:xfrm>
+          <a:prstGeom prst="line">
+            <a:avLst/>
+          </a:prstGeom>
+          <a:noFill/>
+          <a:ln w="10160">
+            <a:solidFill>
+              <a:srgbClr val="8F969D"/>
+            </a:solidFill>
+            <a:prstDash val="solid"/>
+          </a:ln>
+        </p:spPr>
+      </p:sp>
+      <p:sp>
+        <p:nvSpPr>
+          <p:cNvPr id="42" name="Shape 40"/>
+          <p:cNvSpPr/>
+          <p:nvPr/>
+        </p:nvSpPr>
+        <p:spPr>
+          <a:xfrm>
+            <a:off x="1252728" y="4590288"/>
+            <a:ext cx="164592" cy="914"/>
+          </a:xfrm>
+          <a:prstGeom prst="line">
+            <a:avLst/>
+          </a:prstGeom>
+          <a:noFill/>
+          <a:ln w="10160">
+            <a:solidFill>
+              <a:srgbClr val="8F969D"/>
+            </a:solidFill>
+            <a:prstDash val="solid"/>
+          </a:ln>
+        </p:spPr>
+      </p:sp>
+      <p:sp>
+        <p:nvSpPr>
+          <p:cNvPr id="43" name="Text 41"/>
+          <p:cNvSpPr/>
+          <p:nvPr/>
+        </p:nvSpPr>
+        <p:spPr>
+          <a:xfrm>
+            <a:off x="1572768" y="4535424"/>
+            <a:ext cx="3712464" cy="164592"/>
+          </a:xfrm>
+          <a:prstGeom prst="rect">
+            <a:avLst/>
+          </a:prstGeom>
+          <a:noFill/>
+          <a:ln/>
+        </p:spPr>
+        <p:txBody>
+          <a:bodyPr wrap="square" lIns="0" tIns="0" rIns="0" bIns="0" rtlCol="0" anchor="ctr"/>
+          <a:lstStyle/>
+          <a:p>
+            <a:pPr indent="0" marL="0">
+              <a:buNone/>
+            </a:pPr>
+            <a:r>
+              <a:rPr lang="en-US" sz="1150" dirty="0">
+                <a:solidFill>
+                  <a:srgbClr val="1F4E79"/>
+                </a:solidFill>
+                <a:latin typeface="Arial" pitchFamily="34" charset="0"/>
+                <a:ea typeface="Arial" pitchFamily="34" charset="-122"/>
+                <a:cs typeface="Arial" pitchFamily="34" charset="-120"/>
+              </a:rPr>
+              <a:t>功能文档_X1.md</a:t>
+            </a:r>
+            <a:endParaRPr lang="en-US" sz="1150" dirty="0"/>
+          </a:p>
+        </p:txBody>
+      </p:sp>
+      <p:sp>
+        <p:nvSpPr>
+          <p:cNvPr id="44" name="Shape 42"/>
+          <p:cNvSpPr/>
+          <p:nvPr/>
+        </p:nvSpPr>
+        <p:spPr>
+          <a:xfrm>
+            <a:off x="649224" y="4855464"/>
+            <a:ext cx="146304" cy="73152"/>
+          </a:xfrm>
+          <a:prstGeom prst="rect">
+            <a:avLst/>
+          </a:prstGeom>
+          <a:solidFill>
+            <a:srgbClr val="FFFFFF">
+              <a:alpha val="0"/>
+            </a:srgbClr>
+          </a:solidFill>
+          <a:ln w="13970">
+            <a:solidFill>
+              <a:srgbClr val="C60024"/>
+            </a:solidFill>
+            <a:prstDash val="solid"/>
+          </a:ln>
+        </p:spPr>
+      </p:sp>
+      <p:sp>
+        <p:nvSpPr>
+          <p:cNvPr id="45" name="Shape 43"/>
+          <p:cNvSpPr/>
+          <p:nvPr/>
+        </p:nvSpPr>
+        <p:spPr>
+          <a:xfrm>
+            <a:off x="612648" y="4910328"/>
+            <a:ext cx="310896" cy="182880"/>
+          </a:xfrm>
+          <a:prstGeom prst="roundRect">
+            <a:avLst>
+              <a:gd name="adj" fmla="val 15000"/>
+            </a:avLst>
+          </a:prstGeom>
+          <a:solidFill>
+            <a:srgbClr val="FFFFFF">
+              <a:alpha val="0"/>
+            </a:srgbClr>
+          </a:solidFill>
+          <a:ln w="13970">
+            <a:solidFill>
+              <a:srgbClr val="C60024"/>
+            </a:solidFill>
+            <a:prstDash val="solid"/>
+          </a:ln>
+        </p:spPr>
+      </p:sp>
+      <p:sp>
+        <p:nvSpPr>
+          <p:cNvPr id="46" name="Text 44"/>
+          <p:cNvSpPr/>
+          <p:nvPr/>
+        </p:nvSpPr>
+        <p:spPr>
+          <a:xfrm>
+            <a:off x="1088136" y="4837176"/>
+            <a:ext cx="146304" cy="201168"/>
+          </a:xfrm>
+          <a:prstGeom prst="rect">
+            <a:avLst/>
+          </a:prstGeom>
+          <a:noFill/>
+          <a:ln/>
+        </p:spPr>
+        <p:txBody>
+          <a:bodyPr wrap="square" lIns="0" tIns="0" rIns="0" bIns="0" rtlCol="0" anchor="ctr"/>
+          <a:lstStyle/>
+          <a:p>
+            <a:pPr indent="0" marL="0">
+              <a:buNone/>
+            </a:pPr>
+            <a:r>
+              <a:rPr lang="en-US" sz="1500" b="1" dirty="0">
+                <a:solidFill>
+                  <a:srgbClr val="C60024"/>
+                </a:solidFill>
+                <a:latin typeface="Arial" pitchFamily="34" charset="0"/>
+                <a:ea typeface="Arial" pitchFamily="34" charset="-122"/>
+                <a:cs typeface="Arial" pitchFamily="34" charset="-120"/>
+              </a:rPr>
+              <a:t>*</a:t>
+            </a:r>
+            <a:endParaRPr lang="en-US" sz="1500" dirty="0"/>
+          </a:p>
+        </p:txBody>
+      </p:sp>
+      <p:sp>
+        <p:nvSpPr>
+          <p:cNvPr id="47" name="Text 45"/>
+          <p:cNvSpPr/>
+          <p:nvPr/>
+        </p:nvSpPr>
+        <p:spPr>
+          <a:xfrm>
+            <a:off x="1298448" y="4837176"/>
+            <a:ext cx="2103120" cy="219456"/>
+          </a:xfrm>
+          <a:prstGeom prst="rect">
+            <a:avLst/>
+          </a:prstGeom>
+          <a:noFill/>
+          <a:ln/>
+        </p:spPr>
+        <p:txBody>
+          <a:bodyPr wrap="square" lIns="0" tIns="0" rIns="0" bIns="0" rtlCol="0" anchor="ctr"/>
+          <a:lstStyle/>
+          <a:p>
+            <a:pPr indent="0" marL="0">
+              <a:buNone/>
+            </a:pPr>
+            <a:r>
+              <a:rPr lang="en-US" sz="1450" b="1" dirty="0">
+                <a:solidFill>
+                  <a:srgbClr val="1E1E1E"/>
+                </a:solidFill>
+                <a:latin typeface="Arial" pitchFamily="34" charset="0"/>
+                <a:ea typeface="Arial" pitchFamily="34" charset="-122"/>
+                <a:cs typeface="Arial" pitchFamily="34" charset="-120"/>
+              </a:rPr>
+              <a:t>数据架构/</a:t>
+            </a:r>
+            <a:endParaRPr lang="en-US" sz="1450" dirty="0"/>
+          </a:p>
+        </p:txBody>
+      </p:sp>
+      <p:sp>
+        <p:nvSpPr>
+          <p:cNvPr id="48" name="Text 46"/>
+          <p:cNvSpPr/>
+          <p:nvPr/>
+        </p:nvSpPr>
+        <p:spPr>
+          <a:xfrm>
+            <a:off x="2468880" y="4828032"/>
+            <a:ext cx="201168" cy="228600"/>
+          </a:xfrm>
+          <a:prstGeom prst="rect">
+            <a:avLst/>
+          </a:prstGeom>
+          <a:noFill/>
+          <a:ln/>
+        </p:spPr>
+        <p:txBody>
+          <a:bodyPr wrap="square" lIns="0" tIns="0" rIns="0" bIns="0" rtlCol="0" anchor="ctr"/>
+          <a:lstStyle/>
+          <a:p>
+            <a:pPr indent="0" marL="0">
+              <a:buNone/>
+            </a:pPr>
+            <a:r>
+              <a:rPr lang="en-US" sz="1600" dirty="0">
+                <a:solidFill>
+                  <a:srgbClr val="C69C3C"/>
+                </a:solidFill>
+                <a:latin typeface="Arial" pitchFamily="34" charset="0"/>
+                <a:ea typeface="Arial" pitchFamily="34" charset="-122"/>
+                <a:cs typeface="Arial" pitchFamily="34" charset="-120"/>
+              </a:rPr>
+              <a:t>★</a:t>
+            </a:r>
+            <a:endParaRPr lang="en-US" sz="1600" dirty="0"/>
+          </a:p>
+        </p:txBody>
+      </p:sp>
+      <p:sp>
+        <p:nvSpPr>
+          <p:cNvPr id="49" name="Shape 47"/>
+          <p:cNvSpPr/>
+          <p:nvPr/>
+        </p:nvSpPr>
+        <p:spPr>
+          <a:xfrm>
+            <a:off x="1252728" y="5074920"/>
+            <a:ext cx="914" cy="329184"/>
+          </a:xfrm>
+          <a:prstGeom prst="line">
+            <a:avLst/>
+          </a:prstGeom>
+          <a:noFill/>
+          <a:ln w="10160">
+            <a:solidFill>
+              <a:srgbClr val="8F969D"/>
+            </a:solidFill>
+            <a:prstDash val="solid"/>
+          </a:ln>
+        </p:spPr>
+      </p:sp>
+      <p:sp>
+        <p:nvSpPr>
+          <p:cNvPr id="50" name="Shape 48"/>
+          <p:cNvSpPr/>
+          <p:nvPr/>
+        </p:nvSpPr>
+        <p:spPr>
+          <a:xfrm>
+            <a:off x="1252728" y="5184648"/>
+            <a:ext cx="164592" cy="914"/>
+          </a:xfrm>
+          <a:prstGeom prst="line">
+            <a:avLst/>
+          </a:prstGeom>
+          <a:noFill/>
+          <a:ln w="10160">
+            <a:solidFill>
+              <a:srgbClr val="8F969D"/>
+            </a:solidFill>
+            <a:prstDash val="solid"/>
+          </a:ln>
+        </p:spPr>
+      </p:sp>
+      <p:sp>
+        <p:nvSpPr>
+          <p:cNvPr id="51" name="Shape 49"/>
+          <p:cNvSpPr/>
+          <p:nvPr/>
+        </p:nvSpPr>
+        <p:spPr>
+          <a:xfrm>
+            <a:off x="1252728" y="5404104"/>
+            <a:ext cx="164592" cy="914"/>
+          </a:xfrm>
+          <a:prstGeom prst="line">
+            <a:avLst/>
+          </a:prstGeom>
+          <a:noFill/>
+          <a:ln w="10160">
+            <a:solidFill>
+              <a:srgbClr val="8F969D"/>
+            </a:solidFill>
+            <a:prstDash val="solid"/>
+          </a:ln>
+        </p:spPr>
+      </p:sp>
+      <p:sp>
+        <p:nvSpPr>
+          <p:cNvPr id="52" name="Text 50"/>
+          <p:cNvSpPr/>
+          <p:nvPr/>
+        </p:nvSpPr>
+        <p:spPr>
+          <a:xfrm>
+            <a:off x="1572768" y="5129784"/>
+            <a:ext cx="3712464" cy="164592"/>
+          </a:xfrm>
+          <a:prstGeom prst="rect">
+            <a:avLst/>
+          </a:prstGeom>
+          <a:noFill/>
+          <a:ln/>
+        </p:spPr>
+        <p:txBody>
+          <a:bodyPr wrap="square" lIns="0" tIns="0" rIns="0" bIns="0" rtlCol="0" anchor="ctr"/>
+          <a:lstStyle/>
+          <a:p>
+            <a:pPr indent="0" marL="0">
+              <a:buNone/>
+            </a:pPr>
+            <a:r>
+              <a:rPr lang="en-US" sz="1080" dirty="0">
+                <a:solidFill>
+                  <a:srgbClr val="1F4E79"/>
+                </a:solidFill>
+                <a:latin typeface="Arial" pitchFamily="34" charset="0"/>
+                <a:ea typeface="Arial" pitchFamily="34" charset="-122"/>
+                <a:cs typeface="Arial" pitchFamily="34" charset="-120"/>
+              </a:rPr>
+              <a:t>F-ABC_Gauss_1.yaml / F-ABC_MySQL_1.yaml</a:t>
+            </a:r>
+            <a:endParaRPr lang="en-US" sz="1080" dirty="0"/>
+          </a:p>
+        </p:txBody>
+      </p:sp>
+      <p:sp>
+        <p:nvSpPr>
+          <p:cNvPr id="53" name="Text 51"/>
+          <p:cNvSpPr/>
+          <p:nvPr/>
+        </p:nvSpPr>
+        <p:spPr>
+          <a:xfrm>
+            <a:off x="1572768" y="5349240"/>
+            <a:ext cx="3712464" cy="164592"/>
+          </a:xfrm>
+          <a:prstGeom prst="rect">
+            <a:avLst/>
+          </a:prstGeom>
+          <a:noFill/>
+          <a:ln/>
+        </p:spPr>
+        <p:txBody>
+          <a:bodyPr wrap="square" lIns="0" tIns="0" rIns="0" bIns="0" rtlCol="0" anchor="ctr"/>
+          <a:lstStyle/>
+          <a:p>
+            <a:pPr indent="0" marL="0">
+              <a:buNone/>
+            </a:pPr>
+            <a:r>
+              <a:rPr lang="en-US" sz="1150" dirty="0">
+                <a:solidFill>
+                  <a:srgbClr val="1E1E1E"/>
+                </a:solidFill>
+                <a:latin typeface="Arial" pitchFamily="34" charset="0"/>
+                <a:ea typeface="Arial" pitchFamily="34" charset="-122"/>
+                <a:cs typeface="Arial" pitchFamily="34" charset="-120"/>
+              </a:rPr>
+              <a:t>数据实体_X1.md</a:t>
+            </a:r>
+            <a:endParaRPr lang="en-US" sz="1150" dirty="0"/>
+          </a:p>
+        </p:txBody>
+      </p:sp>
+      <p:sp>
+        <p:nvSpPr>
+          <p:cNvPr id="54" name="Shape 52"/>
+          <p:cNvSpPr/>
+          <p:nvPr/>
+        </p:nvSpPr>
+        <p:spPr>
+          <a:xfrm>
+            <a:off x="649224" y="5577840"/>
+            <a:ext cx="146304" cy="73152"/>
+          </a:xfrm>
+          <a:prstGeom prst="rect">
+            <a:avLst/>
+          </a:prstGeom>
+          <a:solidFill>
+            <a:srgbClr val="FFFFFF">
+              <a:alpha val="0"/>
+            </a:srgbClr>
+          </a:solidFill>
+          <a:ln w="13970">
+            <a:solidFill>
+              <a:srgbClr val="C60024"/>
+            </a:solidFill>
+            <a:prstDash val="solid"/>
+          </a:ln>
+        </p:spPr>
+      </p:sp>
+      <p:sp>
+        <p:nvSpPr>
+          <p:cNvPr id="55" name="Shape 53"/>
+          <p:cNvSpPr/>
+          <p:nvPr/>
+        </p:nvSpPr>
+        <p:spPr>
+          <a:xfrm>
+            <a:off x="612648" y="5632704"/>
+            <a:ext cx="310896" cy="182880"/>
+          </a:xfrm>
+          <a:prstGeom prst="roundRect">
+            <a:avLst>
+              <a:gd name="adj" fmla="val 15000"/>
+            </a:avLst>
+          </a:prstGeom>
+          <a:solidFill>
+            <a:srgbClr val="FFFFFF">
+              <a:alpha val="0"/>
+            </a:srgbClr>
+          </a:solidFill>
+          <a:ln w="13970">
+            <a:solidFill>
+              <a:srgbClr val="C60024"/>
+            </a:solidFill>
+            <a:prstDash val="solid"/>
+          </a:ln>
+        </p:spPr>
+      </p:sp>
+      <p:sp>
+        <p:nvSpPr>
+          <p:cNvPr id="56" name="Text 54"/>
+          <p:cNvSpPr/>
+          <p:nvPr/>
+        </p:nvSpPr>
+        <p:spPr>
+          <a:xfrm>
+            <a:off x="1088136" y="5559552"/>
+            <a:ext cx="146304" cy="201168"/>
+          </a:xfrm>
+          <a:prstGeom prst="rect">
+            <a:avLst/>
+          </a:prstGeom>
+          <a:noFill/>
+          <a:ln/>
+        </p:spPr>
+        <p:txBody>
+          <a:bodyPr wrap="square" lIns="0" tIns="0" rIns="0" bIns="0" rtlCol="0" anchor="ctr"/>
+          <a:lstStyle/>
+          <a:p>
+            <a:pPr indent="0" marL="0">
+              <a:buNone/>
+            </a:pPr>
+            <a:r>
+              <a:rPr lang="en-US" sz="1500" b="1" dirty="0">
+                <a:solidFill>
+                  <a:srgbClr val="C60024"/>
+                </a:solidFill>
+                <a:latin typeface="Arial" pitchFamily="34" charset="0"/>
+                <a:ea typeface="Arial" pitchFamily="34" charset="-122"/>
+                <a:cs typeface="Arial" pitchFamily="34" charset="-120"/>
+              </a:rPr>
+              <a:t>*</a:t>
+            </a:r>
+            <a:endParaRPr lang="en-US" sz="1500" dirty="0"/>
+          </a:p>
+        </p:txBody>
+      </p:sp>
+      <p:sp>
+        <p:nvSpPr>
+          <p:cNvPr id="57" name="Text 55"/>
+          <p:cNvSpPr/>
+          <p:nvPr/>
+        </p:nvSpPr>
+        <p:spPr>
+          <a:xfrm>
+            <a:off x="1298448" y="5559552"/>
+            <a:ext cx="2103120" cy="219456"/>
+          </a:xfrm>
+          <a:prstGeom prst="rect">
+            <a:avLst/>
+          </a:prstGeom>
+          <a:noFill/>
+          <a:ln/>
+        </p:spPr>
+        <p:txBody>
+          <a:bodyPr wrap="square" lIns="0" tIns="0" rIns="0" bIns="0" rtlCol="0" anchor="ctr"/>
+          <a:lstStyle/>
+          <a:p>
+            <a:pPr indent="0" marL="0">
+              <a:buNone/>
+            </a:pPr>
+            <a:r>
+              <a:rPr lang="en-US" sz="1450" b="1" dirty="0">
+                <a:solidFill>
+                  <a:srgbClr val="1F4E79"/>
+                </a:solidFill>
+                <a:latin typeface="Arial" pitchFamily="34" charset="0"/>
+                <a:ea typeface="Arial" pitchFamily="34" charset="-122"/>
+                <a:cs typeface="Arial" pitchFamily="34" charset="-120"/>
+              </a:rPr>
+              <a:t>业务知识/</a:t>
+            </a:r>
+            <a:endParaRPr lang="en-US" sz="1450" dirty="0"/>
+          </a:p>
+        </p:txBody>
+      </p:sp>
+      <p:sp>
+        <p:nvSpPr>
+          <p:cNvPr id="58" name="Shape 56"/>
+          <p:cNvSpPr/>
+          <p:nvPr/>
+        </p:nvSpPr>
+        <p:spPr>
+          <a:xfrm>
+            <a:off x="1252728" y="5797296"/>
+            <a:ext cx="914" cy="100584"/>
+          </a:xfrm>
+          <a:prstGeom prst="line">
+            <a:avLst/>
+          </a:prstGeom>
+          <a:noFill/>
+          <a:ln w="10160">
+            <a:solidFill>
+              <a:srgbClr val="8F969D"/>
+            </a:solidFill>
+            <a:prstDash val="solid"/>
+          </a:ln>
+        </p:spPr>
+      </p:sp>
+      <p:sp>
+        <p:nvSpPr>
+          <p:cNvPr id="59" name="Shape 57"/>
+          <p:cNvSpPr/>
+          <p:nvPr/>
+        </p:nvSpPr>
+        <p:spPr>
+          <a:xfrm>
+            <a:off x="1252728" y="5897880"/>
+            <a:ext cx="164592" cy="914"/>
+          </a:xfrm>
+          <a:prstGeom prst="line">
+            <a:avLst/>
+          </a:prstGeom>
+          <a:noFill/>
+          <a:ln w="10160">
+            <a:solidFill>
+              <a:srgbClr val="8F969D"/>
+            </a:solidFill>
+            <a:prstDash val="solid"/>
+          </a:ln>
+        </p:spPr>
+      </p:sp>
+      <p:sp>
+        <p:nvSpPr>
+          <p:cNvPr id="60" name="Text 58"/>
+          <p:cNvSpPr/>
+          <p:nvPr/>
+        </p:nvSpPr>
+        <p:spPr>
+          <a:xfrm>
+            <a:off x="1572768" y="5843016"/>
+            <a:ext cx="3712464" cy="164592"/>
+          </a:xfrm>
+          <a:prstGeom prst="rect">
+            <a:avLst/>
+          </a:prstGeom>
+          <a:noFill/>
+          <a:ln/>
+        </p:spPr>
+        <p:txBody>
+          <a:bodyPr wrap="square" lIns="0" tIns="0" rIns="0" bIns="0" rtlCol="0" anchor="ctr"/>
+          <a:lstStyle/>
+          <a:p>
+            <a:pPr indent="0" marL="0">
+              <a:buNone/>
+            </a:pPr>
+            <a:r>
+              <a:rPr lang="en-US" sz="1150" dirty="0">
+                <a:solidFill>
+                  <a:srgbClr val="1F4E79"/>
+                </a:solidFill>
+                <a:latin typeface="Arial" pitchFamily="34" charset="0"/>
+                <a:ea typeface="Arial" pitchFamily="34" charset="-122"/>
+                <a:cs typeface="Arial" pitchFamily="34" charset="-120"/>
+              </a:rPr>
+              <a:t>领域术语 · 业务规则</a:t>
+            </a:r>
+            <a:endParaRPr lang="en-US" sz="1150" dirty="0"/>
+          </a:p>
+        </p:txBody>
+      </p:sp>
+      <p:sp>
+        <p:nvSpPr>
+          <p:cNvPr id="61" name="Shape 59"/>
+          <p:cNvSpPr/>
+          <p:nvPr/>
+        </p:nvSpPr>
+        <p:spPr>
+          <a:xfrm>
+            <a:off x="5989320" y="1792224"/>
+            <a:ext cx="914" cy="914400"/>
+          </a:xfrm>
+          <a:prstGeom prst="line">
+            <a:avLst/>
+          </a:prstGeom>
+          <a:noFill/>
+          <a:ln w="11430">
+            <a:solidFill>
+              <a:srgbClr val="8F969D"/>
+            </a:solidFill>
+            <a:prstDash val="solid"/>
+          </a:ln>
+        </p:spPr>
+      </p:sp>
+      <p:sp>
+        <p:nvSpPr>
+          <p:cNvPr id="62" name="Shape 60"/>
+          <p:cNvSpPr/>
+          <p:nvPr/>
+        </p:nvSpPr>
+        <p:spPr>
+          <a:xfrm>
+            <a:off x="5989320" y="4133088"/>
+            <a:ext cx="914" cy="914400"/>
+          </a:xfrm>
+          <a:prstGeom prst="line">
+            <a:avLst/>
+          </a:prstGeom>
+          <a:noFill/>
+          <a:ln w="11430">
+            <a:solidFill>
+              <a:srgbClr val="8F969D"/>
+            </a:solidFill>
+            <a:prstDash val="solid"/>
+          </a:ln>
+        </p:spPr>
+      </p:sp>
+      <p:sp>
+        <p:nvSpPr>
+          <p:cNvPr id="63" name="Text 61"/>
+          <p:cNvSpPr/>
+          <p:nvPr/>
+        </p:nvSpPr>
+        <p:spPr>
+          <a:xfrm>
+            <a:off x="5806440" y="2807208"/>
+            <a:ext cx="365760" cy="1188720"/>
+          </a:xfrm>
+          <a:prstGeom prst="rect">
+            <a:avLst/>
+          </a:prstGeom>
+          <a:noFill/>
+          <a:ln/>
+        </p:spPr>
+        <p:txBody>
+          <a:bodyPr wrap="square" lIns="0" tIns="0" rIns="0" bIns="0" rtlCol="0" anchor="ctr"/>
+          <a:lstStyle/>
+          <a:p>
+            <a:pPr algn="ctr" indent="0" marL="0">
+              <a:buNone/>
+            </a:pPr>
+            <a:r>
+              <a:rPr lang="en-US" sz="1600" b="1" dirty="0">
+                <a:solidFill>
+                  <a:srgbClr val="C60024"/>
+                </a:solidFill>
+                <a:latin typeface="Arial" pitchFamily="34" charset="0"/>
+                <a:ea typeface="Arial" pitchFamily="34" charset="-122"/>
+                <a:cs typeface="Arial" pitchFamily="34" charset="-120"/>
+              </a:rPr>
+              <a:t>知</a:t>
+            </a:r>
+            <a:endParaRPr lang="en-US" sz="1600" dirty="0"/>
+          </a:p>
+          <a:p>
+            <a:pPr algn="ctr" indent="0" marL="0">
+              <a:buNone/>
+            </a:pPr>
+            <a:r>
+              <a:rPr lang="en-US" sz="1600" b="1" dirty="0">
+                <a:solidFill>
+                  <a:srgbClr val="C60024"/>
+                </a:solidFill>
+                <a:latin typeface="Arial" pitchFamily="34" charset="0"/>
+                <a:ea typeface="Arial" pitchFamily="34" charset="-122"/>
+                <a:cs typeface="Arial" pitchFamily="34" charset="-120"/>
+              </a:rPr>
+              <a:t>识</a:t>
+            </a:r>
+            <a:endParaRPr lang="en-US" sz="1600" dirty="0"/>
+          </a:p>
+          <a:p>
+            <a:pPr algn="ctr" indent="0" marL="0">
+              <a:buNone/>
+            </a:pPr>
+            <a:r>
+              <a:rPr lang="en-US" sz="1600" b="1" dirty="0">
+                <a:solidFill>
+                  <a:srgbClr val="C60024"/>
+                </a:solidFill>
+                <a:latin typeface="Arial" pitchFamily="34" charset="0"/>
+                <a:ea typeface="Arial" pitchFamily="34" charset="-122"/>
+                <a:cs typeface="Arial" pitchFamily="34" charset="-120"/>
+              </a:rPr>
+              <a:t>沉</a:t>
+            </a:r>
+            <a:endParaRPr lang="en-US" sz="1600" dirty="0"/>
+          </a:p>
+          <a:p>
+            <a:pPr algn="ctr" indent="0" marL="0">
+              <a:buNone/>
+            </a:pPr>
+            <a:r>
+              <a:rPr lang="en-US" sz="1600" b="1" dirty="0">
+                <a:solidFill>
+                  <a:srgbClr val="C60024"/>
+                </a:solidFill>
+                <a:latin typeface="Arial" pitchFamily="34" charset="0"/>
+                <a:ea typeface="Arial" pitchFamily="34" charset="-122"/>
+                <a:cs typeface="Arial" pitchFamily="34" charset="-120"/>
+              </a:rPr>
+              <a:t>淀</a:t>
+            </a:r>
+            <a:endParaRPr lang="en-US" sz="1600" dirty="0"/>
+          </a:p>
+        </p:txBody>
+      </p:sp>
+      <p:sp>
+        <p:nvSpPr>
+          <p:cNvPr id="64" name="Shape 62"/>
+          <p:cNvSpPr/>
+          <p:nvPr/>
+        </p:nvSpPr>
+        <p:spPr>
+          <a:xfrm>
+            <a:off x="164592" y="6208776"/>
+            <a:ext cx="11868912" cy="914"/>
+          </a:xfrm>
+          <a:prstGeom prst="line">
+            <a:avLst/>
+          </a:prstGeom>
+          <a:noFill/>
+          <a:ln w="12700">
+            <a:solidFill>
+              <a:srgbClr val="C60024"/>
+            </a:solidFill>
+            <a:prstDash val="solid"/>
+          </a:ln>
+        </p:spPr>
+      </p:sp>
+      <p:sp>
+        <p:nvSpPr>
+          <p:cNvPr id="65" name="Text 63"/>
+          <p:cNvSpPr/>
+          <p:nvPr/>
+        </p:nvSpPr>
+        <p:spPr>
+          <a:xfrm>
+            <a:off x="859536" y="6400800"/>
+            <a:ext cx="128016" cy="182880"/>
+          </a:xfrm>
+          <a:prstGeom prst="rect">
+            <a:avLst/>
+          </a:prstGeom>
+          <a:noFill/>
+          <a:ln/>
+        </p:spPr>
+        <p:txBody>
+          <a:bodyPr wrap="square" lIns="0" tIns="0" rIns="0" bIns="0" rtlCol="0" anchor="ctr"/>
+          <a:lstStyle/>
+          <a:p>
+            <a:pPr indent="0" marL="0">
+              <a:buNone/>
+            </a:pPr>
+            <a:r>
+              <a:rPr lang="en-US" sz="1600" b="1" dirty="0">
+                <a:solidFill>
+                  <a:srgbClr val="C60024"/>
+                </a:solidFill>
+                <a:latin typeface="Arial" pitchFamily="34" charset="0"/>
+                <a:ea typeface="Arial" pitchFamily="34" charset="-122"/>
+                <a:cs typeface="Arial" pitchFamily="34" charset="-120"/>
+              </a:rPr>
+              <a:t>*</a:t>
+            </a:r>
+            <a:endParaRPr lang="en-US" sz="1600" dirty="0"/>
+          </a:p>
+        </p:txBody>
+      </p:sp>
+      <p:sp>
+        <p:nvSpPr>
+          <p:cNvPr id="66" name="Text 64"/>
+          <p:cNvSpPr/>
+          <p:nvPr/>
+        </p:nvSpPr>
+        <p:spPr>
+          <a:xfrm>
+            <a:off x="1078992" y="6419088"/>
+            <a:ext cx="1600200" cy="164592"/>
+          </a:xfrm>
+          <a:prstGeom prst="rect">
+            <a:avLst/>
+          </a:prstGeom>
+          <a:noFill/>
+          <a:ln/>
+        </p:spPr>
+        <p:txBody>
+          <a:bodyPr wrap="square" lIns="0" tIns="0" rIns="0" bIns="0" rtlCol="0" anchor="ctr"/>
+          <a:lstStyle/>
+          <a:p>
+            <a:pPr indent="0" marL="0">
+              <a:buNone/>
+            </a:pPr>
+            <a:r>
+              <a:rPr lang="en-US" sz="1140" dirty="0">
+                <a:solidFill>
+                  <a:srgbClr val="1E1E1E"/>
+                </a:solidFill>
+                <a:latin typeface="Arial" pitchFamily="34" charset="0"/>
+                <a:ea typeface="Arial" pitchFamily="34" charset="-122"/>
+                <a:cs typeface="Arial" pitchFamily="34" charset="-120"/>
+              </a:rPr>
+              <a:t>开发、测试共同使用</a:t>
+            </a:r>
+            <a:endParaRPr lang="en-US" sz="1140" dirty="0"/>
+          </a:p>
+        </p:txBody>
+      </p:sp>
+      <p:sp>
+        <p:nvSpPr>
+          <p:cNvPr id="67" name="Text 65"/>
+          <p:cNvSpPr/>
+          <p:nvPr/>
+        </p:nvSpPr>
+        <p:spPr>
+          <a:xfrm>
+            <a:off x="3493008" y="6391656"/>
+            <a:ext cx="182880" cy="182880"/>
+          </a:xfrm>
+          <a:prstGeom prst="rect">
+            <a:avLst/>
+          </a:prstGeom>
+          <a:noFill/>
+          <a:ln/>
+        </p:spPr>
+        <p:txBody>
+          <a:bodyPr wrap="square" lIns="0" tIns="0" rIns="0" bIns="0" rtlCol="0" anchor="ctr"/>
+          <a:lstStyle/>
+          <a:p>
+            <a:pPr indent="0" marL="0">
+              <a:buNone/>
+            </a:pPr>
+            <a:r>
+              <a:rPr lang="en-US" sz="1600" dirty="0">
+                <a:solidFill>
+                  <a:srgbClr val="C69C3C"/>
+                </a:solidFill>
+                <a:latin typeface="Arial" pitchFamily="34" charset="0"/>
+                <a:ea typeface="Arial" pitchFamily="34" charset="-122"/>
+                <a:cs typeface="Arial" pitchFamily="34" charset="-120"/>
+              </a:rPr>
+              <a:t>★</a:t>
+            </a:r>
+            <a:endParaRPr lang="en-US" sz="1600" dirty="0"/>
+          </a:p>
+        </p:txBody>
+      </p:sp>
+      <p:sp>
+        <p:nvSpPr>
+          <p:cNvPr id="68" name="Text 66"/>
+          <p:cNvSpPr/>
+          <p:nvPr/>
+        </p:nvSpPr>
+        <p:spPr>
+          <a:xfrm>
+            <a:off x="3776472" y="6419088"/>
+            <a:ext cx="1508760" cy="164592"/>
+          </a:xfrm>
+          <a:prstGeom prst="rect">
+            <a:avLst/>
+          </a:prstGeom>
+          <a:noFill/>
+          <a:ln/>
+        </p:spPr>
+        <p:txBody>
+          <a:bodyPr wrap="square" lIns="0" tIns="0" rIns="0" bIns="0" rtlCol="0" anchor="ctr"/>
+          <a:lstStyle/>
+          <a:p>
+            <a:pPr indent="0" marL="0">
+              <a:buNone/>
+            </a:pPr>
+            <a:r>
+              <a:rPr lang="en-US" sz="1140" dirty="0">
+                <a:solidFill>
+                  <a:srgbClr val="1E1E1E"/>
+                </a:solidFill>
+                <a:latin typeface="Arial" pitchFamily="34" charset="0"/>
+                <a:ea typeface="Arial" pitchFamily="34" charset="-122"/>
+                <a:cs typeface="Arial" pitchFamily="34" charset="-120"/>
+              </a:rPr>
+              <a:t>测试深度参与整理</a:t>
+            </a:r>
+            <a:endParaRPr lang="en-US" sz="1140" dirty="0"/>
+          </a:p>
+        </p:txBody>
+      </p:sp>
+      <p:sp>
+        <p:nvSpPr>
+          <p:cNvPr id="69" name="Text 67"/>
+          <p:cNvSpPr/>
+          <p:nvPr/>
+        </p:nvSpPr>
+        <p:spPr>
+          <a:xfrm>
+            <a:off x="5650992" y="6409944"/>
+            <a:ext cx="73152" cy="164592"/>
+          </a:xfrm>
+          <a:prstGeom prst="rect">
+            <a:avLst/>
+          </a:prstGeom>
+          <a:noFill/>
+          <a:ln/>
+        </p:spPr>
+        <p:txBody>
+          <a:bodyPr wrap="square" lIns="0" tIns="0" rIns="0" bIns="0" rtlCol="0" anchor="ctr"/>
+          <a:lstStyle/>
+          <a:p>
+            <a:pPr indent="0" marL="0">
+              <a:buNone/>
+            </a:pPr>
+            <a:r>
+              <a:rPr lang="en-US" sz="1400" dirty="0">
+                <a:solidFill>
+                  <a:srgbClr val="1E1E1E"/>
+                </a:solidFill>
+                <a:latin typeface="Arial" pitchFamily="34" charset="0"/>
+                <a:ea typeface="Arial" pitchFamily="34" charset="-122"/>
+                <a:cs typeface="Arial" pitchFamily="34" charset="-120"/>
+              </a:rPr>
+              <a:t>|</a:t>
+            </a:r>
+            <a:endParaRPr lang="en-US" sz="1400" dirty="0"/>
+          </a:p>
+        </p:txBody>
+      </p:sp>
+      <p:sp>
+        <p:nvSpPr>
+          <p:cNvPr id="70" name="Text 68"/>
+          <p:cNvSpPr/>
+          <p:nvPr/>
+        </p:nvSpPr>
+        <p:spPr>
+          <a:xfrm>
+            <a:off x="6190488" y="6419088"/>
+            <a:ext cx="4114800" cy="164592"/>
+          </a:xfrm>
+          <a:prstGeom prst="rect">
+            <a:avLst/>
+          </a:prstGeom>
+          <a:noFill/>
+          <a:ln/>
+        </p:spPr>
+        <p:txBody>
+          <a:bodyPr wrap="square" lIns="0" tIns="0" rIns="0" bIns="0" rtlCol="0" anchor="ctr"/>
+          <a:lstStyle/>
+          <a:p>
+            <a:pPr indent="0" marL="0">
+              <a:buNone/>
+            </a:pPr>
+            <a:r>
+              <a:rPr lang="en-US" sz="1140" dirty="0">
+                <a:solidFill>
+                  <a:srgbClr val="1E1E1E"/>
+                </a:solidFill>
+                <a:latin typeface="Arial" pitchFamily="34" charset="0"/>
+                <a:ea typeface="Arial" pitchFamily="34" charset="-122"/>
+                <a:cs typeface="Arial" pitchFamily="34" charset="-120"/>
+              </a:rPr>
+              <a:t>统一沉淀于 docs/**，作为应用级可发布稳定资产</a:t>
+            </a:r>
+            <a:endParaRPr lang="en-US" sz="1140" dirty="0"/>
+          </a:p>
+        </p:txBody>
+      </p:sp>
     </p:spTree>
   </p:cSld>
   <p:clrMapOvr>

--- a/docs/presentations/开发测试协同知识沉淀方法论.pptx
+++ b/docs/presentations/开发测试协同知识沉淀方法论.pptx
@@ -1,15 +1,15 @@
 
 <file path=ppt/presentation.xml><?xml version="1.0" encoding="utf-8"?>
-<p:presentation xmlns:a="http://schemas.openxmlformats.org/drawingml/2006/main" xmlns:r="http://schemas.openxmlformats.org/officeDocument/2006/relationships" xmlns:p="http://schemas.openxmlformats.org/presentationml/2006/main" saveSubsetFonts="1" autoCompressPictures="0">
+<p:presentation xmlns:a="http://schemas.openxmlformats.org/drawingml/2006/main" xmlns:r="http://schemas.openxmlformats.org/officeDocument/2006/relationships" xmlns:p="http://schemas.openxmlformats.org/presentationml/2006/main" autoCompressPictures="0">
   <p:sldMasterIdLst>
     <p:sldMasterId id="2147483648" r:id="rId1"/>
   </p:sldMasterIdLst>
+  <p:notesMasterIdLst>
+    <p:notesMasterId r:id="rId4"/>
+  </p:notesMasterIdLst>
   <p:sldIdLst>
-    <p:sldId id="256" r:id="rId2"/>
+    <p:sldId id="256" r:id="rId3"/>
   </p:sldIdLst>
-  <p:notesMasterIdLst>
-    <p:notesMasterId r:id="rId3"/>
-  </p:notesMasterIdLst>
   <p:sldSz cx="12192000" cy="6858000"/>
   <p:notesSz cx="6858000" cy="12192000"/>
   <p:defaultTextStyle>
@@ -189,7 +189,6 @@
           <a:p>
             <a:fld id="{5282F153-3F37-0F45-9E97-73ACFA13230C}" type="datetimeFigureOut">
               <a:rPr lang="en-US"/>
-              <a:t>7/23/19</a:t>
             </a:fld>
             <a:endParaRPr lang="en-US"/>
           </a:p>
@@ -256,6 +255,7 @@
               <a:rPr lang="en-US"/>
               <a:t>Click to edit Master text styles</a:t>
             </a:r>
+            <a:endParaRPr lang="en-US"/>
           </a:p>
           <a:p>
             <a:pPr lvl="1"/>
@@ -263,6 +263,7 @@
               <a:rPr lang="en-US"/>
               <a:t>Second level</a:t>
             </a:r>
+            <a:endParaRPr lang="en-US"/>
           </a:p>
           <a:p>
             <a:pPr lvl="2"/>
@@ -270,6 +271,7 @@
               <a:rPr lang="en-US"/>
               <a:t>Third level</a:t>
             </a:r>
+            <a:endParaRPr lang="en-US"/>
           </a:p>
           <a:p>
             <a:pPr lvl="3"/>
@@ -277,6 +279,7 @@
               <a:rPr lang="en-US"/>
               <a:t>Fourth level</a:t>
             </a:r>
+            <a:endParaRPr lang="en-US"/>
           </a:p>
           <a:p>
             <a:pPr lvl="4"/>
@@ -284,6 +287,7 @@
               <a:rPr lang="en-US"/>
               <a:t>Fifth level</a:t>
             </a:r>
+            <a:endParaRPr lang="en-US"/>
           </a:p>
         </p:txBody>
       </p:sp>
@@ -347,18 +351,12 @@
           <a:p>
             <a:fld id="{CE5E9CC1-C706-0F49-92D6-E571CC5EEA8F}" type="slidenum">
               <a:rPr lang="en-US"/>
-              <a:t>‹#›</a:t>
             </a:fld>
             <a:endParaRPr lang="en-US"/>
           </a:p>
         </p:txBody>
       </p:sp>
     </p:spTree>
-    <p:extLst>
-      <p:ext uri="{BB962C8B-B14F-4D97-AF65-F5344CB8AC3E}">
-        <p14:creationId xmlns:p14="http://schemas.microsoft.com/office/powerpoint/2010/main" val="1024086991"/>
-      </p:ext>
-    </p:extLst>
   </p:cSld>
   <p:clrMap bg1="lt1" tx1="dk1" bg2="lt2" tx2="dk2" accent1="accent1" accent2="accent2" accent3="accent3" accent4="accent4" accent5="accent5" accent6="accent6" hlink="hlink" folHlink="folHlink"/>
   <p:notesStyle>
@@ -525,18 +523,12 @@
           <a:p>
             <a:fld id="{F7021451-1387-4CA6-816F-3879F97B5CBC}" type="slidenum">
               <a:rPr lang="en-US"/>
-              <a:t>1</a:t>
             </a:fld>
             <a:endParaRPr lang="en-US"/>
           </a:p>
         </p:txBody>
       </p:sp>
     </p:spTree>
-    <p:extLst>
-      <p:ext uri="{BB962C8B-B14F-4D97-AF65-F5344CB8AC3E}">
-        <p14:creationId xmlns:p14="http://schemas.microsoft.com/office/powerpoint/2010/main" val="1024086991"/>
-      </p:ext>
-    </p:extLst>
   </p:cSld>
   <p:clrMapOvr>
     <a:masterClrMapping/>
@@ -577,6 +569,11 @@
 <file path=ppt/slideMasters/slideMaster1.xml><?xml version="1.0" encoding="utf-8"?>
 <p:sldMaster xmlns:a="http://schemas.openxmlformats.org/drawingml/2006/main" xmlns:r="http://schemas.openxmlformats.org/officeDocument/2006/relationships" xmlns:p="http://schemas.openxmlformats.org/presentationml/2006/main">
   <p:cSld>
+    <p:bg>
+      <p:bgRef idx="1001">
+        <a:schemeClr val="bg1"/>
+      </p:bgRef>
+    </p:bg>
     <p:spTree>
       <p:nvGrpSpPr>
         <p:cNvPr id="1" name=""/>
@@ -620,7 +617,7 @@
         <a:spcBef>
           <a:spcPct val="20000"/>
         </a:spcBef>
-        <a:buFont typeface="Arial" pitchFamily="34" charset="0"/>
+        <a:buFont typeface="Arial" panose="020B0604020202090204" pitchFamily="34" charset="0"/>
         <a:buChar char="•"/>
         <a:defRPr sz="3200" kern="1200">
           <a:solidFill>
@@ -635,7 +632,7 @@
         <a:spcBef>
           <a:spcPct val="20000"/>
         </a:spcBef>
-        <a:buFont typeface="Arial" pitchFamily="34" charset="0"/>
+        <a:buFont typeface="Arial" panose="020B0604020202090204" pitchFamily="34" charset="0"/>
         <a:buChar char="–"/>
         <a:defRPr sz="2800" kern="1200">
           <a:solidFill>
@@ -650,7 +647,7 @@
         <a:spcBef>
           <a:spcPct val="20000"/>
         </a:spcBef>
-        <a:buFont typeface="Arial" pitchFamily="34" charset="0"/>
+        <a:buFont typeface="Arial" panose="020B0604020202090204" pitchFamily="34" charset="0"/>
         <a:buChar char="•"/>
         <a:defRPr sz="2400" kern="1200">
           <a:solidFill>
@@ -665,7 +662,7 @@
         <a:spcBef>
           <a:spcPct val="20000"/>
         </a:spcBef>
-        <a:buFont typeface="Arial" pitchFamily="34" charset="0"/>
+        <a:buFont typeface="Arial" panose="020B0604020202090204" pitchFamily="34" charset="0"/>
         <a:buChar char="–"/>
         <a:defRPr sz="2000" kern="1200">
           <a:solidFill>
@@ -680,7 +677,7 @@
         <a:spcBef>
           <a:spcPct val="20000"/>
         </a:spcBef>
-        <a:buFont typeface="Arial" pitchFamily="34" charset="0"/>
+        <a:buFont typeface="Arial" panose="020B0604020202090204" pitchFamily="34" charset="0"/>
         <a:buChar char="»"/>
         <a:defRPr sz="2000" kern="1200">
           <a:solidFill>
@@ -695,7 +692,7 @@
         <a:spcBef>
           <a:spcPct val="20000"/>
         </a:spcBef>
-        <a:buFont typeface="Arial" pitchFamily="34" charset="0"/>
+        <a:buFont typeface="Arial" panose="020B0604020202090204" pitchFamily="34" charset="0"/>
         <a:buChar char="•"/>
         <a:defRPr sz="2000" kern="1200">
           <a:solidFill>
@@ -710,7 +707,7 @@
         <a:spcBef>
           <a:spcPct val="20000"/>
         </a:spcBef>
-        <a:buFont typeface="Arial" pitchFamily="34" charset="0"/>
+        <a:buFont typeface="Arial" panose="020B0604020202090204" pitchFamily="34" charset="0"/>
         <a:buChar char="•"/>
         <a:defRPr sz="2000" kern="1200">
           <a:solidFill>
@@ -725,7 +722,7 @@
         <a:spcBef>
           <a:spcPct val="20000"/>
         </a:spcBef>
-        <a:buFont typeface="Arial" pitchFamily="34" charset="0"/>
+        <a:buFont typeface="Arial" panose="020B0604020202090204" pitchFamily="34" charset="0"/>
         <a:buChar char="•"/>
         <a:defRPr sz="2000" kern="1200">
           <a:solidFill>
@@ -740,7 +737,7 @@
         <a:spcBef>
           <a:spcPct val="20000"/>
         </a:spcBef>
-        <a:buFont typeface="Arial" pitchFamily="34" charset="0"/>
+        <a:buFont typeface="Arial" panose="020B0604020202090204" pitchFamily="34" charset="0"/>
         <a:buChar char="•"/>
         <a:defRPr sz="2000" kern="1200">
           <a:solidFill>
@@ -853,12 +850,13 @@
 
 <file path=ppt/slides/slide1.xml><?xml version="1.0" encoding="utf-8"?>
 <p:sld xmlns:a="http://schemas.openxmlformats.org/drawingml/2006/main" xmlns:r="http://schemas.openxmlformats.org/officeDocument/2006/relationships" xmlns:p="http://schemas.openxmlformats.org/presentationml/2006/main">
-  <p:cSld name="Slide 1">
+  <p:cSld>
     <p:bg>
       <p:bgPr>
         <a:solidFill>
           <a:srgbClr val="FFFFFF"/>
         </a:solidFill>
+        <a:effectLst/>
       </p:bgPr>
     </p:bg>
     <p:spTree>
@@ -883,7 +881,7 @@
         </p:nvSpPr>
         <p:spPr>
           <a:xfrm>
-            <a:off x="182880" y="173736"/>
+            <a:off x="182880" y="282321"/>
             <a:ext cx="146304" cy="841248"/>
           </a:xfrm>
           <a:prstGeom prst="rect">
@@ -910,20 +908,19 @@
         </p:nvSpPr>
         <p:spPr>
           <a:xfrm>
-            <a:off x="502920" y="201168"/>
+            <a:off x="502920" y="282448"/>
             <a:ext cx="6583680" cy="384048"/>
           </a:xfrm>
           <a:prstGeom prst="rect">
             <a:avLst/>
           </a:prstGeom>
           <a:noFill/>
-          <a:ln/>
         </p:spPr>
         <p:txBody>
           <a:bodyPr wrap="square" lIns="0" tIns="0" rIns="0" bIns="0" rtlCol="0" anchor="ctr"/>
           <a:lstStyle/>
           <a:p>
-            <a:pPr indent="0" marL="0">
+            <a:pPr marL="0" indent="0">
               <a:buNone/>
             </a:pPr>
             <a:r>
@@ -931,13 +928,20 @@
                 <a:solidFill>
                   <a:srgbClr val="C60024"/>
                 </a:solidFill>
-                <a:latin typeface="Arial" pitchFamily="34" charset="0"/>
-                <a:ea typeface="Arial" pitchFamily="34" charset="-122"/>
-                <a:cs typeface="Arial" pitchFamily="34" charset="-120"/>
+                <a:latin typeface="微软雅黑" charset="0"/>
+                <a:ea typeface="微软雅黑" charset="0"/>
+                <a:cs typeface="Arial" panose="020B0604020202090204" pitchFamily="34" charset="-120"/>
               </a:rPr>
               <a:t>开发测试协同的知识沉淀方法论</a:t>
             </a:r>
-            <a:endParaRPr lang="en-US" sz="3000" dirty="0"/>
+            <a:endParaRPr lang="en-US" sz="3000" b="1" dirty="0">
+              <a:solidFill>
+                <a:srgbClr val="C60024"/>
+              </a:solidFill>
+              <a:latin typeface="微软雅黑" charset="0"/>
+              <a:ea typeface="微软雅黑" charset="0"/>
+              <a:cs typeface="Arial" panose="020B0604020202090204" pitchFamily="34" charset="-120"/>
+            </a:endParaRPr>
           </a:p>
         </p:txBody>
       </p:sp>
@@ -949,34 +953,58 @@
         </p:nvSpPr>
         <p:spPr>
           <a:xfrm>
-            <a:off x="512064" y="758952"/>
-            <a:ext cx="11109960" cy="228600"/>
-          </a:xfrm>
-          <a:prstGeom prst="rect">
-            <a:avLst/>
-          </a:prstGeom>
-          <a:noFill/>
-          <a:ln/>
+            <a:off x="502920" y="775335"/>
+            <a:ext cx="11109960" cy="487680"/>
+          </a:xfrm>
+          <a:prstGeom prst="rect">
+            <a:avLst/>
+          </a:prstGeom>
+          <a:noFill/>
         </p:spPr>
         <p:txBody>
           <a:bodyPr wrap="square" lIns="0" tIns="0" rIns="0" bIns="0" rtlCol="0" anchor="ctr"/>
           <a:lstStyle/>
           <a:p>
-            <a:pPr indent="0" marL="0">
+            <a:pPr marL="0" indent="0">
               <a:buNone/>
             </a:pPr>
             <a:r>
-              <a:rPr lang="en-US" sz="1160" dirty="0">
+              <a:rPr lang="en-US" sz="1600" dirty="0">
                 <a:solidFill>
                   <a:srgbClr val="1E1E1E"/>
                 </a:solidFill>
-                <a:latin typeface="Arial" pitchFamily="34" charset="0"/>
-                <a:ea typeface="Arial" pitchFamily="34" charset="-122"/>
-                <a:cs typeface="Arial" pitchFamily="34" charset="-120"/>
+                <a:latin typeface="微软雅黑" charset="0"/>
+                <a:ea typeface="微软雅黑" charset="0"/>
+                <a:cs typeface="Arial" panose="020B0604020202090204" pitchFamily="34" charset="-120"/>
               </a:rPr>
-              <a:t>以应用级共享知识目录为底座，开发沉淀系统事实，测试深度参与功能与数据知识结构化，持续转化为可复用、可追溯的测试资产。</a:t>
+              <a:t>以应用级共享知识目录为底座，开发沉淀系统事实，测试深度参与</a:t>
             </a:r>
-            <a:endParaRPr lang="en-US" sz="1160" dirty="0"/>
+            <a:r>
+              <a:rPr lang="zh-CN" altLang="en-US" sz="1600" dirty="0">
+                <a:solidFill>
+                  <a:srgbClr val="1E1E1E"/>
+                </a:solidFill>
+                <a:latin typeface="微软雅黑" charset="0"/>
+                <a:ea typeface="微软雅黑" charset="0"/>
+                <a:cs typeface="Arial" panose="020B0604020202090204" pitchFamily="34" charset="-120"/>
+              </a:rPr>
+              <a:t>流程、</a:t>
+            </a:r>
+            <a:r>
+              <a:rPr lang="en-US" sz="1600" dirty="0">
+                <a:solidFill>
+                  <a:srgbClr val="1E1E1E"/>
+                </a:solidFill>
+                <a:latin typeface="微软雅黑" charset="0"/>
+                <a:ea typeface="微软雅黑" charset="0"/>
+                <a:cs typeface="Arial" panose="020B0604020202090204" pitchFamily="34" charset="-120"/>
+              </a:rPr>
+              <a:t>功能与数据知识结构化，持续转化为可复用、可追溯的测试资产。</a:t>
+            </a:r>
+            <a:endParaRPr lang="en-US" sz="1600" dirty="0">
+              <a:latin typeface="微软雅黑" charset="0"/>
+              <a:ea typeface="微软雅黑" charset="0"/>
+            </a:endParaRPr>
           </a:p>
         </p:txBody>
       </p:sp>
@@ -988,8 +1016,8 @@
         </p:nvSpPr>
         <p:spPr>
           <a:xfrm>
-            <a:off x="164592" y="1170432"/>
-            <a:ext cx="5413248" cy="4837176"/>
+            <a:off x="182880" y="1468755"/>
+            <a:ext cx="5413375" cy="5026660"/>
           </a:xfrm>
           <a:prstGeom prst="roundRect">
             <a:avLst>
@@ -1017,8 +1045,8 @@
         </p:nvSpPr>
         <p:spPr>
           <a:xfrm>
-            <a:off x="6355080" y="1170432"/>
-            <a:ext cx="5669280" cy="4837176"/>
+            <a:off x="6015355" y="1468755"/>
+            <a:ext cx="6027420" cy="4991735"/>
           </a:xfrm>
           <a:prstGeom prst="roundRect">
             <a:avLst>
@@ -1046,7 +1074,7 @@
         </p:nvSpPr>
         <p:spPr>
           <a:xfrm>
-            <a:off x="466344" y="1280160"/>
+            <a:off x="484759" y="1578610"/>
             <a:ext cx="4828032" cy="384048"/>
           </a:xfrm>
           <a:prstGeom prst="roundRect">
@@ -1075,8 +1103,8 @@
         </p:nvSpPr>
         <p:spPr>
           <a:xfrm>
-            <a:off x="6656832" y="1280160"/>
-            <a:ext cx="5111496" cy="384048"/>
+            <a:off x="6235700" y="1578610"/>
+            <a:ext cx="5551170" cy="384175"/>
           </a:xfrm>
           <a:prstGeom prst="roundRect">
             <a:avLst>
@@ -1104,20 +1132,19 @@
         </p:nvSpPr>
         <p:spPr>
           <a:xfrm>
-            <a:off x="1371600" y="1362456"/>
+            <a:off x="1390015" y="1683766"/>
             <a:ext cx="2971800" cy="182880"/>
           </a:xfrm>
           <a:prstGeom prst="rect">
             <a:avLst/>
           </a:prstGeom>
           <a:noFill/>
-          <a:ln/>
         </p:spPr>
         <p:txBody>
           <a:bodyPr wrap="square" lIns="0" tIns="0" rIns="0" bIns="0" rtlCol="0" anchor="ctr"/>
           <a:lstStyle/>
           <a:p>
-            <a:pPr algn="ctr" indent="0" marL="0">
+            <a:pPr marL="0" indent="0" algn="ctr">
               <a:buNone/>
             </a:pPr>
             <a:r>
@@ -1125,13 +1152,20 @@
                 <a:solidFill>
                   <a:srgbClr val="FFFFFF"/>
                 </a:solidFill>
-                <a:latin typeface="Arial" pitchFamily="34" charset="0"/>
-                <a:ea typeface="Arial" pitchFamily="34" charset="-122"/>
-                <a:cs typeface="Arial" pitchFamily="34" charset="-120"/>
+                <a:latin typeface="微软雅黑" charset="0"/>
+                <a:ea typeface="微软雅黑" charset="0"/>
+                <a:cs typeface="微软雅黑" charset="0"/>
               </a:rPr>
               <a:t>应用级整合目录  docs/</a:t>
             </a:r>
-            <a:endParaRPr lang="en-US" sz="1800" dirty="0"/>
+            <a:endParaRPr lang="en-US" sz="1800" b="1" dirty="0">
+              <a:solidFill>
+                <a:srgbClr val="FFFFFF"/>
+              </a:solidFill>
+              <a:latin typeface="微软雅黑" charset="0"/>
+              <a:ea typeface="微软雅黑" charset="0"/>
+              <a:cs typeface="微软雅黑" charset="0"/>
+            </a:endParaRPr>
           </a:p>
         </p:txBody>
       </p:sp>
@@ -1143,20 +1177,19 @@
         </p:nvSpPr>
         <p:spPr>
           <a:xfrm>
-            <a:off x="8046720" y="1362456"/>
+            <a:off x="8065135" y="1683766"/>
             <a:ext cx="2359152" cy="182880"/>
           </a:xfrm>
           <a:prstGeom prst="rect">
             <a:avLst/>
           </a:prstGeom>
           <a:noFill/>
-          <a:ln/>
         </p:spPr>
         <p:txBody>
           <a:bodyPr wrap="square" lIns="0" tIns="0" rIns="0" bIns="0" rtlCol="0" anchor="ctr"/>
           <a:lstStyle/>
           <a:p>
-            <a:pPr algn="ctr" indent="0" marL="0">
+            <a:pPr marL="0" indent="0" algn="ctr">
               <a:buNone/>
             </a:pPr>
             <a:r>
@@ -1164,133 +1197,44 @@
                 <a:solidFill>
                   <a:srgbClr val="FFFFFF"/>
                 </a:solidFill>
-                <a:latin typeface="Arial" pitchFamily="34" charset="0"/>
-                <a:ea typeface="Arial" pitchFamily="34" charset="-122"/>
-                <a:cs typeface="Arial" pitchFamily="34" charset="-120"/>
+                <a:latin typeface="微软雅黑" charset="0"/>
+                <a:ea typeface="微软雅黑" charset="0"/>
+                <a:cs typeface="Arial" panose="020B0604020202090204" pitchFamily="34" charset="-120"/>
               </a:rPr>
-              <a:t>测试实际案例</a:t>
+              <a:t>实际案例</a:t>
             </a:r>
-            <a:endParaRPr lang="en-US" sz="1800" dirty="0"/>
+            <a:endParaRPr lang="en-US" sz="1800" b="1" dirty="0">
+              <a:solidFill>
+                <a:srgbClr val="FFFFFF"/>
+              </a:solidFill>
+              <a:latin typeface="微软雅黑" charset="0"/>
+              <a:ea typeface="微软雅黑" charset="0"/>
+              <a:cs typeface="Arial" panose="020B0604020202090204" pitchFamily="34" charset="-120"/>
+            </a:endParaRPr>
           </a:p>
         </p:txBody>
       </p:sp>
       <p:sp>
         <p:nvSpPr>
-          <p:cNvPr id="11" name="Shape 9"/>
-          <p:cNvSpPr/>
-          <p:nvPr/>
-        </p:nvSpPr>
-        <p:spPr>
-          <a:xfrm>
-            <a:off x="649224" y="1865376"/>
-            <a:ext cx="146304" cy="73152"/>
-          </a:xfrm>
-          <a:prstGeom prst="rect">
-            <a:avLst/>
-          </a:prstGeom>
-          <a:solidFill>
-            <a:srgbClr val="FFFFFF">
-              <a:alpha val="0"/>
-            </a:srgbClr>
-          </a:solidFill>
-          <a:ln w="13970">
-            <a:solidFill>
-              <a:srgbClr val="C60024"/>
-            </a:solidFill>
-            <a:prstDash val="solid"/>
-          </a:ln>
-        </p:spPr>
-      </p:sp>
-      <p:sp>
-        <p:nvSpPr>
-          <p:cNvPr id="12" name="Shape 10"/>
-          <p:cNvSpPr/>
-          <p:nvPr/>
-        </p:nvSpPr>
-        <p:spPr>
-          <a:xfrm>
-            <a:off x="612648" y="1920240"/>
-            <a:ext cx="310896" cy="182880"/>
-          </a:xfrm>
-          <a:prstGeom prst="roundRect">
-            <a:avLst>
-              <a:gd name="adj" fmla="val 15000"/>
-            </a:avLst>
-          </a:prstGeom>
-          <a:solidFill>
-            <a:srgbClr val="FFFFFF">
-              <a:alpha val="0"/>
-            </a:srgbClr>
-          </a:solidFill>
-          <a:ln w="13970">
-            <a:solidFill>
-              <a:srgbClr val="C60024"/>
-            </a:solidFill>
-            <a:prstDash val="solid"/>
-          </a:ln>
-        </p:spPr>
-      </p:sp>
-      <p:sp>
-        <p:nvSpPr>
-          <p:cNvPr id="13" name="Text 11"/>
-          <p:cNvSpPr/>
-          <p:nvPr/>
-        </p:nvSpPr>
-        <p:spPr>
-          <a:xfrm>
-            <a:off x="1088136" y="1847088"/>
-            <a:ext cx="146304" cy="201168"/>
-          </a:xfrm>
-          <a:prstGeom prst="rect">
-            <a:avLst/>
-          </a:prstGeom>
-          <a:noFill/>
-          <a:ln/>
+          <p:cNvPr id="14" name="Text 12"/>
+          <p:cNvSpPr/>
+          <p:nvPr/>
+        </p:nvSpPr>
+        <p:spPr>
+          <a:xfrm>
+            <a:off x="1106678" y="2144903"/>
+            <a:ext cx="2103120" cy="219456"/>
+          </a:xfrm>
+          <a:prstGeom prst="rect">
+            <a:avLst/>
+          </a:prstGeom>
+          <a:noFill/>
         </p:spPr>
         <p:txBody>
           <a:bodyPr wrap="square" lIns="0" tIns="0" rIns="0" bIns="0" rtlCol="0" anchor="ctr"/>
           <a:lstStyle/>
           <a:p>
-            <a:pPr indent="0" marL="0">
-              <a:buNone/>
-            </a:pPr>
-            <a:r>
-              <a:rPr lang="en-US" sz="1500" b="1" dirty="0">
-                <a:solidFill>
-                  <a:srgbClr val="C60024"/>
-                </a:solidFill>
-                <a:latin typeface="Arial" pitchFamily="34" charset="0"/>
-                <a:ea typeface="Arial" pitchFamily="34" charset="-122"/>
-                <a:cs typeface="Arial" pitchFamily="34" charset="-120"/>
-              </a:rPr>
-              <a:t>*</a:t>
-            </a:r>
-            <a:endParaRPr lang="en-US" sz="1500" dirty="0"/>
-          </a:p>
-        </p:txBody>
-      </p:sp>
-      <p:sp>
-        <p:nvSpPr>
-          <p:cNvPr id="14" name="Text 12"/>
-          <p:cNvSpPr/>
-          <p:nvPr/>
-        </p:nvSpPr>
-        <p:spPr>
-          <a:xfrm>
-            <a:off x="1298448" y="1847088"/>
-            <a:ext cx="2103120" cy="219456"/>
-          </a:xfrm>
-          <a:prstGeom prst="rect">
-            <a:avLst/>
-          </a:prstGeom>
-          <a:noFill/>
-          <a:ln/>
-        </p:spPr>
-        <p:txBody>
-          <a:bodyPr wrap="square" lIns="0" tIns="0" rIns="0" bIns="0" rtlCol="0" anchor="ctr"/>
-          <a:lstStyle/>
-          <a:p>
-            <a:pPr indent="0" marL="0">
+            <a:pPr marL="0" indent="0">
               <a:buNone/>
             </a:pPr>
             <a:r>
@@ -1298,13 +1242,20 @@
                 <a:solidFill>
                   <a:srgbClr val="1E1E1E"/>
                 </a:solidFill>
-                <a:latin typeface="Arial" pitchFamily="34" charset="0"/>
-                <a:ea typeface="Arial" pitchFamily="34" charset="-122"/>
-                <a:cs typeface="Arial" pitchFamily="34" charset="-120"/>
+                <a:latin typeface="微软雅黑" charset="0"/>
+                <a:ea typeface="微软雅黑" charset="0"/>
+                <a:cs typeface="微软雅黑" charset="0"/>
               </a:rPr>
               <a:t>应用架构/</a:t>
             </a:r>
-            <a:endParaRPr lang="en-US" sz="1450" dirty="0"/>
+            <a:endParaRPr lang="en-US" sz="1450" b="1" dirty="0">
+              <a:solidFill>
+                <a:srgbClr val="1E1E1E"/>
+              </a:solidFill>
+              <a:latin typeface="微软雅黑" charset="0"/>
+              <a:ea typeface="微软雅黑" charset="0"/>
+              <a:cs typeface="微软雅黑" charset="0"/>
+            </a:endParaRPr>
           </a:p>
         </p:txBody>
       </p:sp>
@@ -1316,7 +1267,7 @@
         </p:nvSpPr>
         <p:spPr>
           <a:xfrm>
-            <a:off x="1252728" y="2084832"/>
+            <a:off x="1107313" y="2383282"/>
             <a:ext cx="914" cy="310896"/>
           </a:xfrm>
           <a:prstGeom prst="line">
@@ -1339,7 +1290,7 @@
         </p:nvSpPr>
         <p:spPr>
           <a:xfrm>
-            <a:off x="1252728" y="2185416"/>
+            <a:off x="1107313" y="2483866"/>
             <a:ext cx="164592" cy="914"/>
           </a:xfrm>
           <a:prstGeom prst="line">
@@ -1362,7 +1313,7 @@
         </p:nvSpPr>
         <p:spPr>
           <a:xfrm>
-            <a:off x="1252728" y="2395728"/>
+            <a:off x="1107313" y="2694178"/>
             <a:ext cx="164592" cy="914"/>
           </a:xfrm>
           <a:prstGeom prst="line">
@@ -1385,20 +1336,19 @@
         </p:nvSpPr>
         <p:spPr>
           <a:xfrm>
-            <a:off x="1572768" y="2130552"/>
+            <a:off x="1271778" y="2429002"/>
             <a:ext cx="3712464" cy="164592"/>
           </a:xfrm>
           <a:prstGeom prst="rect">
             <a:avLst/>
           </a:prstGeom>
           <a:noFill/>
-          <a:ln/>
         </p:spPr>
         <p:txBody>
           <a:bodyPr wrap="square" lIns="0" tIns="0" rIns="0" bIns="0" rtlCol="0" anchor="ctr"/>
           <a:lstStyle/>
           <a:p>
-            <a:pPr indent="0" marL="0">
+            <a:pPr marL="0" indent="0">
               <a:buNone/>
             </a:pPr>
             <a:r>
@@ -1406,13 +1356,20 @@
                 <a:solidFill>
                   <a:srgbClr val="1F4E79"/>
                 </a:solidFill>
-                <a:latin typeface="Arial" pitchFamily="34" charset="0"/>
-                <a:ea typeface="Arial" pitchFamily="34" charset="-122"/>
-                <a:cs typeface="Arial" pitchFamily="34" charset="-120"/>
+                <a:latin typeface="微软雅黑" charset="0"/>
+                <a:ea typeface="微软雅黑" charset="0"/>
+                <a:cs typeface="微软雅黑" charset="0"/>
               </a:rPr>
               <a:t>应用架构.md</a:t>
             </a:r>
-            <a:endParaRPr lang="en-US" sz="1150" dirty="0"/>
+            <a:endParaRPr lang="en-US" sz="1150" dirty="0">
+              <a:solidFill>
+                <a:srgbClr val="1F4E79"/>
+              </a:solidFill>
+              <a:latin typeface="微软雅黑" charset="0"/>
+              <a:ea typeface="微软雅黑" charset="0"/>
+              <a:cs typeface="微软雅黑" charset="0"/>
+            </a:endParaRPr>
           </a:p>
         </p:txBody>
       </p:sp>
@@ -1424,20 +1381,19 @@
         </p:nvSpPr>
         <p:spPr>
           <a:xfrm>
-            <a:off x="1572768" y="2340864"/>
+            <a:off x="1271143" y="2639314"/>
             <a:ext cx="3712464" cy="164592"/>
           </a:xfrm>
           <a:prstGeom prst="rect">
             <a:avLst/>
           </a:prstGeom>
           <a:noFill/>
-          <a:ln/>
         </p:spPr>
         <p:txBody>
           <a:bodyPr wrap="square" lIns="0" tIns="0" rIns="0" bIns="0" rtlCol="0" anchor="ctr"/>
           <a:lstStyle/>
           <a:p>
-            <a:pPr indent="0" marL="0">
+            <a:pPr marL="0" indent="0">
               <a:buNone/>
             </a:pPr>
             <a:r>
@@ -1445,94 +1401,44 @@
                 <a:solidFill>
                   <a:srgbClr val="1E1E1E"/>
                 </a:solidFill>
-                <a:latin typeface="Arial" pitchFamily="34" charset="0"/>
-                <a:ea typeface="Arial" pitchFamily="34" charset="-122"/>
-                <a:cs typeface="Arial" pitchFamily="34" charset="-120"/>
+                <a:latin typeface="微软雅黑" charset="0"/>
+                <a:ea typeface="微软雅黑" charset="0"/>
+                <a:cs typeface="微软雅黑" charset="0"/>
               </a:rPr>
               <a:t>应用场景说明书_XXX.md</a:t>
             </a:r>
-            <a:endParaRPr lang="en-US" sz="1150" dirty="0"/>
+            <a:endParaRPr lang="en-US" sz="1150" dirty="0">
+              <a:solidFill>
+                <a:srgbClr val="1E1E1E"/>
+              </a:solidFill>
+              <a:latin typeface="微软雅黑" charset="0"/>
+              <a:ea typeface="微软雅黑" charset="0"/>
+              <a:cs typeface="微软雅黑" charset="0"/>
+            </a:endParaRPr>
           </a:p>
         </p:txBody>
       </p:sp>
       <p:sp>
         <p:nvSpPr>
-          <p:cNvPr id="20" name="Shape 18"/>
-          <p:cNvSpPr/>
-          <p:nvPr/>
-        </p:nvSpPr>
-        <p:spPr>
-          <a:xfrm>
-            <a:off x="649224" y="2688336"/>
-            <a:ext cx="146304" cy="73152"/>
-          </a:xfrm>
-          <a:prstGeom prst="rect">
-            <a:avLst/>
-          </a:prstGeom>
-          <a:solidFill>
-            <a:srgbClr val="FFFFFF">
-              <a:alpha val="0"/>
-            </a:srgbClr>
-          </a:solidFill>
-          <a:ln w="13970">
-            <a:solidFill>
-              <a:srgbClr val="C60024"/>
-            </a:solidFill>
-            <a:prstDash val="solid"/>
-          </a:ln>
-        </p:spPr>
-      </p:sp>
-      <p:sp>
-        <p:nvSpPr>
-          <p:cNvPr id="21" name="Shape 19"/>
-          <p:cNvSpPr/>
-          <p:nvPr/>
-        </p:nvSpPr>
-        <p:spPr>
-          <a:xfrm>
-            <a:off x="612648" y="2743200"/>
-            <a:ext cx="310896" cy="182880"/>
-          </a:xfrm>
-          <a:prstGeom prst="roundRect">
-            <a:avLst>
-              <a:gd name="adj" fmla="val 15000"/>
-            </a:avLst>
-          </a:prstGeom>
-          <a:solidFill>
-            <a:srgbClr val="FFFFFF">
-              <a:alpha val="0"/>
-            </a:srgbClr>
-          </a:solidFill>
-          <a:ln w="13970">
-            <a:solidFill>
-              <a:srgbClr val="C60024"/>
-            </a:solidFill>
-            <a:prstDash val="solid"/>
-          </a:ln>
-        </p:spPr>
-      </p:sp>
-      <p:sp>
-        <p:nvSpPr>
           <p:cNvPr id="22" name="Text 20"/>
           <p:cNvSpPr/>
           <p:nvPr/>
         </p:nvSpPr>
         <p:spPr>
           <a:xfrm>
-            <a:off x="1088136" y="2670048"/>
+            <a:off x="1106551" y="2968498"/>
             <a:ext cx="2103120" cy="219456"/>
           </a:xfrm>
           <a:prstGeom prst="rect">
             <a:avLst/>
           </a:prstGeom>
           <a:noFill/>
-          <a:ln/>
         </p:spPr>
         <p:txBody>
           <a:bodyPr wrap="square" lIns="0" tIns="0" rIns="0" bIns="0" rtlCol="0" anchor="ctr"/>
           <a:lstStyle/>
           <a:p>
-            <a:pPr indent="0" marL="0">
+            <a:pPr marL="0" indent="0">
               <a:buNone/>
             </a:pPr>
             <a:r>
@@ -1540,13 +1446,20 @@
                 <a:solidFill>
                   <a:srgbClr val="1F4E79"/>
                 </a:solidFill>
-                <a:latin typeface="Arial" pitchFamily="34" charset="0"/>
-                <a:ea typeface="Arial" pitchFamily="34" charset="-122"/>
-                <a:cs typeface="Arial" pitchFamily="34" charset="-120"/>
+                <a:latin typeface="微软雅黑" charset="0"/>
+                <a:ea typeface="微软雅黑" charset="0"/>
+                <a:cs typeface="微软雅黑" charset="0"/>
               </a:rPr>
               <a:t>技术架构/</a:t>
             </a:r>
-            <a:endParaRPr lang="en-US" sz="1450" dirty="0"/>
+            <a:endParaRPr lang="en-US" sz="1450" b="1" dirty="0">
+              <a:solidFill>
+                <a:srgbClr val="1F4E79"/>
+              </a:solidFill>
+              <a:latin typeface="微软雅黑" charset="0"/>
+              <a:ea typeface="微软雅黑" charset="0"/>
+              <a:cs typeface="微软雅黑" charset="0"/>
+            </a:endParaRPr>
           </a:p>
         </p:txBody>
       </p:sp>
@@ -1558,7 +1471,7 @@
         </p:nvSpPr>
         <p:spPr>
           <a:xfrm>
-            <a:off x="1252728" y="2907792"/>
+            <a:off x="1271143" y="3206242"/>
             <a:ext cx="914" cy="109728"/>
           </a:xfrm>
           <a:prstGeom prst="line">
@@ -1581,7 +1494,7 @@
         </p:nvSpPr>
         <p:spPr>
           <a:xfrm>
-            <a:off x="1252728" y="3017520"/>
+            <a:off x="1271143" y="3315970"/>
             <a:ext cx="164592" cy="914"/>
           </a:xfrm>
           <a:prstGeom prst="line">
@@ -1604,20 +1517,19 @@
         </p:nvSpPr>
         <p:spPr>
           <a:xfrm>
-            <a:off x="1572768" y="2962656"/>
+            <a:off x="1426718" y="3240786"/>
             <a:ext cx="3712464" cy="164592"/>
           </a:xfrm>
           <a:prstGeom prst="rect">
             <a:avLst/>
           </a:prstGeom>
           <a:noFill/>
-          <a:ln/>
         </p:spPr>
         <p:txBody>
           <a:bodyPr wrap="square" lIns="0" tIns="0" rIns="0" bIns="0" rtlCol="0" anchor="ctr"/>
           <a:lstStyle/>
           <a:p>
-            <a:pPr indent="0" marL="0">
+            <a:pPr marL="0" indent="0">
               <a:buNone/>
             </a:pPr>
             <a:r>
@@ -1625,133 +1537,44 @@
                 <a:solidFill>
                   <a:srgbClr val="1F4E79"/>
                 </a:solidFill>
-                <a:latin typeface="Arial" pitchFamily="34" charset="0"/>
-                <a:ea typeface="Arial" pitchFamily="34" charset="-122"/>
-                <a:cs typeface="Arial" pitchFamily="34" charset="-120"/>
+                <a:latin typeface="微软雅黑" charset="0"/>
+                <a:ea typeface="微软雅黑" charset="0"/>
+                <a:cs typeface="微软雅黑" charset="0"/>
               </a:rPr>
               <a:t>工程概览_A/B.md</a:t>
             </a:r>
-            <a:endParaRPr lang="en-US" sz="1150" dirty="0"/>
+            <a:endParaRPr lang="en-US" sz="1150" dirty="0">
+              <a:solidFill>
+                <a:srgbClr val="1F4E79"/>
+              </a:solidFill>
+              <a:latin typeface="微软雅黑" charset="0"/>
+              <a:ea typeface="微软雅黑" charset="0"/>
+              <a:cs typeface="微软雅黑" charset="0"/>
+            </a:endParaRPr>
           </a:p>
         </p:txBody>
       </p:sp>
       <p:sp>
         <p:nvSpPr>
-          <p:cNvPr id="26" name="Shape 24"/>
-          <p:cNvSpPr/>
-          <p:nvPr/>
-        </p:nvSpPr>
-        <p:spPr>
-          <a:xfrm>
-            <a:off x="649224" y="3255264"/>
-            <a:ext cx="146304" cy="73152"/>
-          </a:xfrm>
-          <a:prstGeom prst="rect">
-            <a:avLst/>
-          </a:prstGeom>
-          <a:solidFill>
-            <a:srgbClr val="FFFFFF">
-              <a:alpha val="0"/>
-            </a:srgbClr>
-          </a:solidFill>
-          <a:ln w="13970">
-            <a:solidFill>
-              <a:srgbClr val="C60024"/>
-            </a:solidFill>
-            <a:prstDash val="solid"/>
-          </a:ln>
-        </p:spPr>
-      </p:sp>
-      <p:sp>
-        <p:nvSpPr>
-          <p:cNvPr id="27" name="Shape 25"/>
-          <p:cNvSpPr/>
-          <p:nvPr/>
-        </p:nvSpPr>
-        <p:spPr>
-          <a:xfrm>
-            <a:off x="612648" y="3310128"/>
-            <a:ext cx="310896" cy="182880"/>
-          </a:xfrm>
-          <a:prstGeom prst="roundRect">
-            <a:avLst>
-              <a:gd name="adj" fmla="val 15000"/>
-            </a:avLst>
-          </a:prstGeom>
-          <a:solidFill>
-            <a:srgbClr val="FFFFFF">
-              <a:alpha val="0"/>
-            </a:srgbClr>
-          </a:solidFill>
-          <a:ln w="13970">
-            <a:solidFill>
-              <a:srgbClr val="C60024"/>
-            </a:solidFill>
-            <a:prstDash val="solid"/>
-          </a:ln>
-        </p:spPr>
-      </p:sp>
-      <p:sp>
-        <p:nvSpPr>
-          <p:cNvPr id="28" name="Text 26"/>
-          <p:cNvSpPr/>
-          <p:nvPr/>
-        </p:nvSpPr>
-        <p:spPr>
-          <a:xfrm>
-            <a:off x="1088136" y="3236976"/>
-            <a:ext cx="146304" cy="201168"/>
-          </a:xfrm>
-          <a:prstGeom prst="rect">
-            <a:avLst/>
-          </a:prstGeom>
-          <a:noFill/>
-          <a:ln/>
+          <p:cNvPr id="29" name="Text 27"/>
+          <p:cNvSpPr/>
+          <p:nvPr/>
+        </p:nvSpPr>
+        <p:spPr>
+          <a:xfrm>
+            <a:off x="1152398" y="3544951"/>
+            <a:ext cx="2103120" cy="219456"/>
+          </a:xfrm>
+          <a:prstGeom prst="rect">
+            <a:avLst/>
+          </a:prstGeom>
+          <a:noFill/>
         </p:spPr>
         <p:txBody>
           <a:bodyPr wrap="square" lIns="0" tIns="0" rIns="0" bIns="0" rtlCol="0" anchor="ctr"/>
           <a:lstStyle/>
           <a:p>
-            <a:pPr indent="0" marL="0">
-              <a:buNone/>
-            </a:pPr>
-            <a:r>
-              <a:rPr lang="en-US" sz="1500" b="1" dirty="0">
-                <a:solidFill>
-                  <a:srgbClr val="C60024"/>
-                </a:solidFill>
-                <a:latin typeface="Arial" pitchFamily="34" charset="0"/>
-                <a:ea typeface="Arial" pitchFamily="34" charset="-122"/>
-                <a:cs typeface="Arial" pitchFamily="34" charset="-120"/>
-              </a:rPr>
-              <a:t>*</a:t>
-            </a:r>
-            <a:endParaRPr lang="en-US" sz="1500" dirty="0"/>
-          </a:p>
-        </p:txBody>
-      </p:sp>
-      <p:sp>
-        <p:nvSpPr>
-          <p:cNvPr id="29" name="Text 27"/>
-          <p:cNvSpPr/>
-          <p:nvPr/>
-        </p:nvSpPr>
-        <p:spPr>
-          <a:xfrm>
-            <a:off x="1298448" y="3236976"/>
-            <a:ext cx="2103120" cy="219456"/>
-          </a:xfrm>
-          <a:prstGeom prst="rect">
-            <a:avLst/>
-          </a:prstGeom>
-          <a:noFill/>
-          <a:ln/>
-        </p:spPr>
-        <p:txBody>
-          <a:bodyPr wrap="square" lIns="0" tIns="0" rIns="0" bIns="0" rtlCol="0" anchor="ctr"/>
-          <a:lstStyle/>
-          <a:p>
-            <a:pPr indent="0" marL="0">
+            <a:pPr marL="0" indent="0">
               <a:buNone/>
             </a:pPr>
             <a:r>
@@ -1759,13 +1582,20 @@
                 <a:solidFill>
                   <a:srgbClr val="1E1E1E"/>
                 </a:solidFill>
-                <a:latin typeface="Arial" pitchFamily="34" charset="0"/>
-                <a:ea typeface="Arial" pitchFamily="34" charset="-122"/>
-                <a:cs typeface="Arial" pitchFamily="34" charset="-120"/>
+                <a:latin typeface="微软雅黑" charset="0"/>
+                <a:ea typeface="微软雅黑" charset="0"/>
+                <a:cs typeface="微软雅黑" charset="0"/>
               </a:rPr>
               <a:t>功能模块/</a:t>
             </a:r>
-            <a:endParaRPr lang="en-US" sz="1450" dirty="0"/>
+            <a:endParaRPr lang="en-US" sz="1450" b="1" dirty="0">
+              <a:solidFill>
+                <a:srgbClr val="1E1E1E"/>
+              </a:solidFill>
+              <a:latin typeface="微软雅黑" charset="0"/>
+              <a:ea typeface="微软雅黑" charset="0"/>
+              <a:cs typeface="微软雅黑" charset="0"/>
+            </a:endParaRPr>
           </a:p>
         </p:txBody>
       </p:sp>
@@ -1777,20 +1607,19 @@
         </p:nvSpPr>
         <p:spPr>
           <a:xfrm>
-            <a:off x="2468880" y="3227832"/>
+            <a:off x="2322830" y="3535807"/>
             <a:ext cx="201168" cy="228600"/>
           </a:xfrm>
           <a:prstGeom prst="rect">
             <a:avLst/>
           </a:prstGeom>
           <a:noFill/>
-          <a:ln/>
         </p:spPr>
         <p:txBody>
           <a:bodyPr wrap="square" lIns="0" tIns="0" rIns="0" bIns="0" rtlCol="0" anchor="ctr"/>
           <a:lstStyle/>
           <a:p>
-            <a:pPr indent="0" marL="0">
+            <a:pPr marL="0" indent="0">
               <a:buNone/>
             </a:pPr>
             <a:r>
@@ -1798,13 +1627,20 @@
                 <a:solidFill>
                   <a:srgbClr val="C69C3C"/>
                 </a:solidFill>
-                <a:latin typeface="Arial" pitchFamily="34" charset="0"/>
-                <a:ea typeface="Arial" pitchFamily="34" charset="-122"/>
-                <a:cs typeface="Arial" pitchFamily="34" charset="-120"/>
+                <a:latin typeface="微软雅黑" charset="0"/>
+                <a:ea typeface="微软雅黑" charset="0"/>
+                <a:cs typeface="Arial" panose="020B0604020202090204" pitchFamily="34" charset="-120"/>
               </a:rPr>
               <a:t>★</a:t>
             </a:r>
-            <a:endParaRPr lang="en-US" sz="1600" dirty="0"/>
+            <a:endParaRPr lang="en-US" sz="1600" dirty="0">
+              <a:solidFill>
+                <a:srgbClr val="C69C3C"/>
+              </a:solidFill>
+              <a:latin typeface="微软雅黑" charset="0"/>
+              <a:ea typeface="微软雅黑" charset="0"/>
+              <a:cs typeface="Arial" panose="020B0604020202090204" pitchFamily="34" charset="-120"/>
+            </a:endParaRPr>
           </a:p>
         </p:txBody>
       </p:sp>
@@ -1816,7 +1652,7 @@
         </p:nvSpPr>
         <p:spPr>
           <a:xfrm>
-            <a:off x="1252728" y="3474720"/>
+            <a:off x="1106678" y="3782695"/>
             <a:ext cx="914" cy="539496"/>
           </a:xfrm>
           <a:prstGeom prst="line">
@@ -1839,7 +1675,7 @@
         </p:nvSpPr>
         <p:spPr>
           <a:xfrm>
-            <a:off x="1252728" y="3575304"/>
+            <a:off x="1106678" y="3883279"/>
             <a:ext cx="164592" cy="914"/>
           </a:xfrm>
           <a:prstGeom prst="line">
@@ -1862,7 +1698,7 @@
         </p:nvSpPr>
         <p:spPr>
           <a:xfrm>
-            <a:off x="1252728" y="3794760"/>
+            <a:off x="1106678" y="4102735"/>
             <a:ext cx="164592" cy="914"/>
           </a:xfrm>
           <a:prstGeom prst="line">
@@ -1885,7 +1721,7 @@
         </p:nvSpPr>
         <p:spPr>
           <a:xfrm>
-            <a:off x="1252728" y="4014216"/>
+            <a:off x="1106678" y="4322191"/>
             <a:ext cx="164592" cy="914"/>
           </a:xfrm>
           <a:prstGeom prst="line">
@@ -1908,20 +1744,19 @@
         </p:nvSpPr>
         <p:spPr>
           <a:xfrm>
-            <a:off x="1572768" y="3520440"/>
+            <a:off x="1271778" y="3828415"/>
             <a:ext cx="3712464" cy="164592"/>
           </a:xfrm>
           <a:prstGeom prst="rect">
             <a:avLst/>
           </a:prstGeom>
           <a:noFill/>
-          <a:ln/>
         </p:spPr>
         <p:txBody>
           <a:bodyPr wrap="square" lIns="0" tIns="0" rIns="0" bIns="0" rtlCol="0" anchor="ctr"/>
           <a:lstStyle/>
           <a:p>
-            <a:pPr indent="0" marL="0">
+            <a:pPr marL="0" indent="0">
               <a:buNone/>
             </a:pPr>
             <a:r>
@@ -1929,13 +1764,20 @@
                 <a:solidFill>
                   <a:srgbClr val="1F4E79"/>
                 </a:solidFill>
-                <a:latin typeface="Arial" pitchFamily="34" charset="0"/>
-                <a:ea typeface="Arial" pitchFamily="34" charset="-122"/>
-                <a:cs typeface="Arial" pitchFamily="34" charset="-120"/>
+                <a:latin typeface="微软雅黑" charset="0"/>
+                <a:ea typeface="微软雅黑" charset="0"/>
+                <a:cs typeface="微软雅黑" charset="0"/>
               </a:rPr>
               <a:t>功能模块_XXX.md</a:t>
             </a:r>
-            <a:endParaRPr lang="en-US" sz="1150" dirty="0"/>
+            <a:endParaRPr lang="en-US" sz="1150" dirty="0">
+              <a:solidFill>
+                <a:srgbClr val="1F4E79"/>
+              </a:solidFill>
+              <a:latin typeface="微软雅黑" charset="0"/>
+              <a:ea typeface="微软雅黑" charset="0"/>
+              <a:cs typeface="微软雅黑" charset="0"/>
+            </a:endParaRPr>
           </a:p>
         </p:txBody>
       </p:sp>
@@ -1947,20 +1789,19 @@
         </p:nvSpPr>
         <p:spPr>
           <a:xfrm>
-            <a:off x="1572768" y="3739896"/>
+            <a:off x="1262253" y="4047871"/>
             <a:ext cx="3712464" cy="164592"/>
           </a:xfrm>
           <a:prstGeom prst="rect">
             <a:avLst/>
           </a:prstGeom>
           <a:noFill/>
-          <a:ln/>
         </p:spPr>
         <p:txBody>
           <a:bodyPr wrap="square" lIns="0" tIns="0" rIns="0" bIns="0" rtlCol="0" anchor="ctr"/>
           <a:lstStyle/>
           <a:p>
-            <a:pPr indent="0" marL="0">
+            <a:pPr marL="0" indent="0">
               <a:buNone/>
             </a:pPr>
             <a:r>
@@ -1968,13 +1809,20 @@
                 <a:solidFill>
                   <a:srgbClr val="1E1E1E"/>
                 </a:solidFill>
-                <a:latin typeface="Arial" pitchFamily="34" charset="0"/>
-                <a:ea typeface="Arial" pitchFamily="34" charset="-122"/>
-                <a:cs typeface="Arial" pitchFamily="34" charset="-120"/>
+                <a:latin typeface="微软雅黑" charset="0"/>
+                <a:ea typeface="微软雅黑" charset="0"/>
+                <a:cs typeface="微软雅黑" charset="0"/>
               </a:rPr>
               <a:t>测试设计文档_X1.md</a:t>
             </a:r>
-            <a:endParaRPr lang="en-US" sz="1150" dirty="0"/>
+            <a:endParaRPr lang="en-US" sz="1150" dirty="0">
+              <a:solidFill>
+                <a:srgbClr val="1E1E1E"/>
+              </a:solidFill>
+              <a:latin typeface="微软雅黑" charset="0"/>
+              <a:ea typeface="微软雅黑" charset="0"/>
+              <a:cs typeface="微软雅黑" charset="0"/>
+            </a:endParaRPr>
           </a:p>
         </p:txBody>
       </p:sp>
@@ -1986,20 +1834,19 @@
         </p:nvSpPr>
         <p:spPr>
           <a:xfrm>
-            <a:off x="1572768" y="3959352"/>
+            <a:off x="1271143" y="4258437"/>
             <a:ext cx="3712464" cy="164592"/>
           </a:xfrm>
           <a:prstGeom prst="rect">
             <a:avLst/>
           </a:prstGeom>
           <a:noFill/>
-          <a:ln/>
         </p:spPr>
         <p:txBody>
           <a:bodyPr wrap="square" lIns="0" tIns="0" rIns="0" bIns="0" rtlCol="0" anchor="ctr"/>
           <a:lstStyle/>
           <a:p>
-            <a:pPr indent="0" marL="0">
+            <a:pPr marL="0" indent="0">
               <a:buNone/>
             </a:pPr>
             <a:r>
@@ -2007,94 +1854,44 @@
                 <a:solidFill>
                   <a:srgbClr val="1E1E1E"/>
                 </a:solidFill>
-                <a:latin typeface="Arial" pitchFamily="34" charset="0"/>
-                <a:ea typeface="Arial" pitchFamily="34" charset="-122"/>
-                <a:cs typeface="Arial" pitchFamily="34" charset="-120"/>
+                <a:latin typeface="微软雅黑" charset="0"/>
+                <a:ea typeface="微软雅黑" charset="0"/>
+                <a:cs typeface="微软雅黑" charset="0"/>
               </a:rPr>
               <a:t>测试案例_X1.md</a:t>
             </a:r>
-            <a:endParaRPr lang="en-US" sz="1150" dirty="0"/>
+            <a:endParaRPr lang="en-US" sz="1150" dirty="0">
+              <a:solidFill>
+                <a:srgbClr val="1E1E1E"/>
+              </a:solidFill>
+              <a:latin typeface="微软雅黑" charset="0"/>
+              <a:ea typeface="微软雅黑" charset="0"/>
+              <a:cs typeface="微软雅黑" charset="0"/>
+            </a:endParaRPr>
           </a:p>
         </p:txBody>
       </p:sp>
       <p:sp>
         <p:nvSpPr>
-          <p:cNvPr id="38" name="Shape 36"/>
-          <p:cNvSpPr/>
-          <p:nvPr/>
-        </p:nvSpPr>
-        <p:spPr>
-          <a:xfrm>
-            <a:off x="649224" y="4261104"/>
-            <a:ext cx="146304" cy="73152"/>
-          </a:xfrm>
-          <a:prstGeom prst="rect">
-            <a:avLst/>
-          </a:prstGeom>
-          <a:solidFill>
-            <a:srgbClr val="FFFFFF">
-              <a:alpha val="0"/>
-            </a:srgbClr>
-          </a:solidFill>
-          <a:ln w="13970">
-            <a:solidFill>
-              <a:srgbClr val="C60024"/>
-            </a:solidFill>
-            <a:prstDash val="solid"/>
-          </a:ln>
-        </p:spPr>
-      </p:sp>
-      <p:sp>
-        <p:nvSpPr>
-          <p:cNvPr id="39" name="Shape 37"/>
-          <p:cNvSpPr/>
-          <p:nvPr/>
-        </p:nvSpPr>
-        <p:spPr>
-          <a:xfrm>
-            <a:off x="612648" y="4315968"/>
-            <a:ext cx="310896" cy="182880"/>
-          </a:xfrm>
-          <a:prstGeom prst="roundRect">
-            <a:avLst>
-              <a:gd name="adj" fmla="val 15000"/>
-            </a:avLst>
-          </a:prstGeom>
-          <a:solidFill>
-            <a:srgbClr val="FFFFFF">
-              <a:alpha val="0"/>
-            </a:srgbClr>
-          </a:solidFill>
-          <a:ln w="13970">
-            <a:solidFill>
-              <a:srgbClr val="C60024"/>
-            </a:solidFill>
-            <a:prstDash val="solid"/>
-          </a:ln>
-        </p:spPr>
-      </p:sp>
-      <p:sp>
-        <p:nvSpPr>
           <p:cNvPr id="40" name="Text 38"/>
           <p:cNvSpPr/>
           <p:nvPr/>
         </p:nvSpPr>
         <p:spPr>
           <a:xfrm>
-            <a:off x="1088136" y="4242816"/>
+            <a:off x="1106551" y="4541266"/>
             <a:ext cx="2103120" cy="219456"/>
           </a:xfrm>
           <a:prstGeom prst="rect">
             <a:avLst/>
           </a:prstGeom>
           <a:noFill/>
-          <a:ln/>
         </p:spPr>
         <p:txBody>
           <a:bodyPr wrap="square" lIns="0" tIns="0" rIns="0" bIns="0" rtlCol="0" anchor="ctr"/>
           <a:lstStyle/>
           <a:p>
-            <a:pPr indent="0" marL="0">
+            <a:pPr marL="0" indent="0">
               <a:buNone/>
             </a:pPr>
             <a:r>
@@ -2102,13 +1899,20 @@
                 <a:solidFill>
                   <a:srgbClr val="1F4E79"/>
                 </a:solidFill>
-                <a:latin typeface="Arial" pitchFamily="34" charset="0"/>
-                <a:ea typeface="Arial" pitchFamily="34" charset="-122"/>
-                <a:cs typeface="Arial" pitchFamily="34" charset="-120"/>
+                <a:latin typeface="微软雅黑" charset="0"/>
+                <a:ea typeface="微软雅黑" charset="0"/>
+                <a:cs typeface="微软雅黑" charset="0"/>
               </a:rPr>
               <a:t>功能文档/</a:t>
             </a:r>
-            <a:endParaRPr lang="en-US" sz="1450" dirty="0"/>
+            <a:endParaRPr lang="en-US" sz="1450" b="1" dirty="0">
+              <a:solidFill>
+                <a:srgbClr val="1F4E79"/>
+              </a:solidFill>
+              <a:latin typeface="微软雅黑" charset="0"/>
+              <a:ea typeface="微软雅黑" charset="0"/>
+              <a:cs typeface="微软雅黑" charset="0"/>
+            </a:endParaRPr>
           </a:p>
         </p:txBody>
       </p:sp>
@@ -2120,7 +1924,7 @@
         </p:nvSpPr>
         <p:spPr>
           <a:xfrm>
-            <a:off x="1252728" y="4480560"/>
+            <a:off x="1271143" y="4779010"/>
             <a:ext cx="914" cy="109728"/>
           </a:xfrm>
           <a:prstGeom prst="line">
@@ -2143,7 +1947,7 @@
         </p:nvSpPr>
         <p:spPr>
           <a:xfrm>
-            <a:off x="1252728" y="4590288"/>
+            <a:off x="1271143" y="4888738"/>
             <a:ext cx="164592" cy="914"/>
           </a:xfrm>
           <a:prstGeom prst="line">
@@ -2166,20 +1970,19 @@
         </p:nvSpPr>
         <p:spPr>
           <a:xfrm>
-            <a:off x="1572768" y="4535424"/>
+            <a:off x="1426718" y="4833874"/>
             <a:ext cx="3712464" cy="164592"/>
           </a:xfrm>
           <a:prstGeom prst="rect">
             <a:avLst/>
           </a:prstGeom>
           <a:noFill/>
-          <a:ln/>
         </p:spPr>
         <p:txBody>
           <a:bodyPr wrap="square" lIns="0" tIns="0" rIns="0" bIns="0" rtlCol="0" anchor="ctr"/>
           <a:lstStyle/>
           <a:p>
-            <a:pPr indent="0" marL="0">
+            <a:pPr marL="0" indent="0">
               <a:buNone/>
             </a:pPr>
             <a:r>
@@ -2187,133 +1990,44 @@
                 <a:solidFill>
                   <a:srgbClr val="1F4E79"/>
                 </a:solidFill>
-                <a:latin typeface="Arial" pitchFamily="34" charset="0"/>
-                <a:ea typeface="Arial" pitchFamily="34" charset="-122"/>
-                <a:cs typeface="Arial" pitchFamily="34" charset="-120"/>
+                <a:latin typeface="微软雅黑" charset="0"/>
+                <a:ea typeface="微软雅黑" charset="0"/>
+                <a:cs typeface="微软雅黑" charset="0"/>
               </a:rPr>
               <a:t>功能文档_X1.md</a:t>
             </a:r>
-            <a:endParaRPr lang="en-US" sz="1150" dirty="0"/>
+            <a:endParaRPr lang="en-US" sz="1150" dirty="0">
+              <a:solidFill>
+                <a:srgbClr val="1F4E79"/>
+              </a:solidFill>
+              <a:latin typeface="微软雅黑" charset="0"/>
+              <a:ea typeface="微软雅黑" charset="0"/>
+              <a:cs typeface="微软雅黑" charset="0"/>
+            </a:endParaRPr>
           </a:p>
         </p:txBody>
       </p:sp>
       <p:sp>
         <p:nvSpPr>
-          <p:cNvPr id="44" name="Shape 42"/>
-          <p:cNvSpPr/>
-          <p:nvPr/>
-        </p:nvSpPr>
-        <p:spPr>
-          <a:xfrm>
-            <a:off x="649224" y="4855464"/>
-            <a:ext cx="146304" cy="73152"/>
-          </a:xfrm>
-          <a:prstGeom prst="rect">
-            <a:avLst/>
-          </a:prstGeom>
-          <a:solidFill>
-            <a:srgbClr val="FFFFFF">
-              <a:alpha val="0"/>
-            </a:srgbClr>
-          </a:solidFill>
-          <a:ln w="13970">
-            <a:solidFill>
-              <a:srgbClr val="C60024"/>
-            </a:solidFill>
-            <a:prstDash val="solid"/>
-          </a:ln>
-        </p:spPr>
-      </p:sp>
-      <p:sp>
-        <p:nvSpPr>
-          <p:cNvPr id="45" name="Shape 43"/>
-          <p:cNvSpPr/>
-          <p:nvPr/>
-        </p:nvSpPr>
-        <p:spPr>
-          <a:xfrm>
-            <a:off x="612648" y="4910328"/>
-            <a:ext cx="310896" cy="182880"/>
-          </a:xfrm>
-          <a:prstGeom prst="roundRect">
-            <a:avLst>
-              <a:gd name="adj" fmla="val 15000"/>
-            </a:avLst>
-          </a:prstGeom>
-          <a:solidFill>
-            <a:srgbClr val="FFFFFF">
-              <a:alpha val="0"/>
-            </a:srgbClr>
-          </a:solidFill>
-          <a:ln w="13970">
-            <a:solidFill>
-              <a:srgbClr val="C60024"/>
-            </a:solidFill>
-            <a:prstDash val="solid"/>
-          </a:ln>
-        </p:spPr>
-      </p:sp>
-      <p:sp>
-        <p:nvSpPr>
-          <p:cNvPr id="46" name="Text 44"/>
-          <p:cNvSpPr/>
-          <p:nvPr/>
-        </p:nvSpPr>
-        <p:spPr>
-          <a:xfrm>
-            <a:off x="1088136" y="4837176"/>
-            <a:ext cx="146304" cy="201168"/>
-          </a:xfrm>
-          <a:prstGeom prst="rect">
-            <a:avLst/>
-          </a:prstGeom>
-          <a:noFill/>
-          <a:ln/>
+          <p:cNvPr id="47" name="Text 45"/>
+          <p:cNvSpPr/>
+          <p:nvPr/>
+        </p:nvSpPr>
+        <p:spPr>
+          <a:xfrm>
+            <a:off x="1152398" y="5135626"/>
+            <a:ext cx="2103120" cy="219456"/>
+          </a:xfrm>
+          <a:prstGeom prst="rect">
+            <a:avLst/>
+          </a:prstGeom>
+          <a:noFill/>
         </p:spPr>
         <p:txBody>
           <a:bodyPr wrap="square" lIns="0" tIns="0" rIns="0" bIns="0" rtlCol="0" anchor="ctr"/>
           <a:lstStyle/>
           <a:p>
-            <a:pPr indent="0" marL="0">
-              <a:buNone/>
-            </a:pPr>
-            <a:r>
-              <a:rPr lang="en-US" sz="1500" b="1" dirty="0">
-                <a:solidFill>
-                  <a:srgbClr val="C60024"/>
-                </a:solidFill>
-                <a:latin typeface="Arial" pitchFamily="34" charset="0"/>
-                <a:ea typeface="Arial" pitchFamily="34" charset="-122"/>
-                <a:cs typeface="Arial" pitchFamily="34" charset="-120"/>
-              </a:rPr>
-              <a:t>*</a:t>
-            </a:r>
-            <a:endParaRPr lang="en-US" sz="1500" dirty="0"/>
-          </a:p>
-        </p:txBody>
-      </p:sp>
-      <p:sp>
-        <p:nvSpPr>
-          <p:cNvPr id="47" name="Text 45"/>
-          <p:cNvSpPr/>
-          <p:nvPr/>
-        </p:nvSpPr>
-        <p:spPr>
-          <a:xfrm>
-            <a:off x="1298448" y="4837176"/>
-            <a:ext cx="2103120" cy="219456"/>
-          </a:xfrm>
-          <a:prstGeom prst="rect">
-            <a:avLst/>
-          </a:prstGeom>
-          <a:noFill/>
-          <a:ln/>
-        </p:spPr>
-        <p:txBody>
-          <a:bodyPr wrap="square" lIns="0" tIns="0" rIns="0" bIns="0" rtlCol="0" anchor="ctr"/>
-          <a:lstStyle/>
-          <a:p>
-            <a:pPr indent="0" marL="0">
+            <a:pPr marL="0" indent="0">
               <a:buNone/>
             </a:pPr>
             <a:r>
@@ -2321,13 +2035,20 @@
                 <a:solidFill>
                   <a:srgbClr val="1E1E1E"/>
                 </a:solidFill>
-                <a:latin typeface="Arial" pitchFamily="34" charset="0"/>
-                <a:ea typeface="Arial" pitchFamily="34" charset="-122"/>
-                <a:cs typeface="Arial" pitchFamily="34" charset="-120"/>
+                <a:latin typeface="微软雅黑" charset="0"/>
+                <a:ea typeface="微软雅黑" charset="0"/>
+                <a:cs typeface="微软雅黑" charset="0"/>
               </a:rPr>
               <a:t>数据架构/</a:t>
             </a:r>
-            <a:endParaRPr lang="en-US" sz="1450" dirty="0"/>
+            <a:endParaRPr lang="en-US" sz="1450" b="1" dirty="0">
+              <a:solidFill>
+                <a:srgbClr val="1E1E1E"/>
+              </a:solidFill>
+              <a:latin typeface="微软雅黑" charset="0"/>
+              <a:ea typeface="微软雅黑" charset="0"/>
+              <a:cs typeface="微软雅黑" charset="0"/>
+            </a:endParaRPr>
           </a:p>
         </p:txBody>
       </p:sp>
@@ -2339,20 +2060,19 @@
         </p:nvSpPr>
         <p:spPr>
           <a:xfrm>
-            <a:off x="2468880" y="4828032"/>
+            <a:off x="2322830" y="5126482"/>
             <a:ext cx="201168" cy="228600"/>
           </a:xfrm>
           <a:prstGeom prst="rect">
             <a:avLst/>
           </a:prstGeom>
           <a:noFill/>
-          <a:ln/>
         </p:spPr>
         <p:txBody>
           <a:bodyPr wrap="square" lIns="0" tIns="0" rIns="0" bIns="0" rtlCol="0" anchor="ctr"/>
           <a:lstStyle/>
           <a:p>
-            <a:pPr indent="0" marL="0">
+            <a:pPr marL="0" indent="0">
               <a:buNone/>
             </a:pPr>
             <a:r>
@@ -2360,13 +2080,20 @@
                 <a:solidFill>
                   <a:srgbClr val="C69C3C"/>
                 </a:solidFill>
-                <a:latin typeface="Arial" pitchFamily="34" charset="0"/>
-                <a:ea typeface="Arial" pitchFamily="34" charset="-122"/>
-                <a:cs typeface="Arial" pitchFamily="34" charset="-120"/>
+                <a:latin typeface="微软雅黑" charset="0"/>
+                <a:ea typeface="微软雅黑" charset="0"/>
+                <a:cs typeface="Arial" panose="020B0604020202090204" pitchFamily="34" charset="-120"/>
               </a:rPr>
               <a:t>★</a:t>
             </a:r>
-            <a:endParaRPr lang="en-US" sz="1600" dirty="0"/>
+            <a:endParaRPr lang="en-US" sz="1600" dirty="0">
+              <a:solidFill>
+                <a:srgbClr val="C69C3C"/>
+              </a:solidFill>
+              <a:latin typeface="微软雅黑" charset="0"/>
+              <a:ea typeface="微软雅黑" charset="0"/>
+              <a:cs typeface="Arial" panose="020B0604020202090204" pitchFamily="34" charset="-120"/>
+            </a:endParaRPr>
           </a:p>
         </p:txBody>
       </p:sp>
@@ -2378,7 +2105,7 @@
         </p:nvSpPr>
         <p:spPr>
           <a:xfrm>
-            <a:off x="1252728" y="5074920"/>
+            <a:off x="1106678" y="5373370"/>
             <a:ext cx="914" cy="329184"/>
           </a:xfrm>
           <a:prstGeom prst="line">
@@ -2401,7 +2128,7 @@
         </p:nvSpPr>
         <p:spPr>
           <a:xfrm>
-            <a:off x="1252728" y="5184648"/>
+            <a:off x="1106678" y="5483098"/>
             <a:ext cx="164592" cy="914"/>
           </a:xfrm>
           <a:prstGeom prst="line">
@@ -2424,7 +2151,7 @@
         </p:nvSpPr>
         <p:spPr>
           <a:xfrm>
-            <a:off x="1252728" y="5404104"/>
+            <a:off x="1106678" y="5702554"/>
             <a:ext cx="164592" cy="914"/>
           </a:xfrm>
           <a:prstGeom prst="line">
@@ -2447,20 +2174,19 @@
         </p:nvSpPr>
         <p:spPr>
           <a:xfrm>
-            <a:off x="1572768" y="5129784"/>
+            <a:off x="1262253" y="5428234"/>
             <a:ext cx="3712464" cy="164592"/>
           </a:xfrm>
           <a:prstGeom prst="rect">
             <a:avLst/>
           </a:prstGeom>
           <a:noFill/>
-          <a:ln/>
         </p:spPr>
         <p:txBody>
           <a:bodyPr wrap="square" lIns="0" tIns="0" rIns="0" bIns="0" rtlCol="0" anchor="ctr"/>
           <a:lstStyle/>
           <a:p>
-            <a:pPr indent="0" marL="0">
+            <a:pPr marL="0" indent="0">
               <a:buNone/>
             </a:pPr>
             <a:r>
@@ -2468,13 +2194,20 @@
                 <a:solidFill>
                   <a:srgbClr val="1F4E79"/>
                 </a:solidFill>
-                <a:latin typeface="Arial" pitchFamily="34" charset="0"/>
-                <a:ea typeface="Arial" pitchFamily="34" charset="-122"/>
-                <a:cs typeface="Arial" pitchFamily="34" charset="-120"/>
+                <a:latin typeface="微软雅黑" charset="0"/>
+                <a:ea typeface="微软雅黑" charset="0"/>
+                <a:cs typeface="Arial" panose="020B0604020202090204" pitchFamily="34" charset="-120"/>
               </a:rPr>
               <a:t>F-ABC_Gauss_1.yaml / F-ABC_MySQL_1.yaml</a:t>
             </a:r>
-            <a:endParaRPr lang="en-US" sz="1080" dirty="0"/>
+            <a:endParaRPr lang="en-US" sz="1080" dirty="0">
+              <a:solidFill>
+                <a:srgbClr val="1F4E79"/>
+              </a:solidFill>
+              <a:latin typeface="微软雅黑" charset="0"/>
+              <a:ea typeface="微软雅黑" charset="0"/>
+              <a:cs typeface="Arial" panose="020B0604020202090204" pitchFamily="34" charset="-120"/>
+            </a:endParaRPr>
           </a:p>
         </p:txBody>
       </p:sp>
@@ -2486,20 +2219,19 @@
         </p:nvSpPr>
         <p:spPr>
           <a:xfrm>
-            <a:off x="1572768" y="5349240"/>
+            <a:off x="1262253" y="5647690"/>
             <a:ext cx="3712464" cy="164592"/>
           </a:xfrm>
           <a:prstGeom prst="rect">
             <a:avLst/>
           </a:prstGeom>
           <a:noFill/>
-          <a:ln/>
         </p:spPr>
         <p:txBody>
           <a:bodyPr wrap="square" lIns="0" tIns="0" rIns="0" bIns="0" rtlCol="0" anchor="ctr"/>
           <a:lstStyle/>
           <a:p>
-            <a:pPr indent="0" marL="0">
+            <a:pPr marL="0" indent="0">
               <a:buNone/>
             </a:pPr>
             <a:r>
@@ -2507,133 +2239,44 @@
                 <a:solidFill>
                   <a:srgbClr val="1E1E1E"/>
                 </a:solidFill>
-                <a:latin typeface="Arial" pitchFamily="34" charset="0"/>
-                <a:ea typeface="Arial" pitchFamily="34" charset="-122"/>
-                <a:cs typeface="Arial" pitchFamily="34" charset="-120"/>
+                <a:latin typeface="微软雅黑" charset="0"/>
+                <a:ea typeface="微软雅黑" charset="0"/>
+                <a:cs typeface="微软雅黑" charset="0"/>
               </a:rPr>
               <a:t>数据实体_X1.md</a:t>
             </a:r>
-            <a:endParaRPr lang="en-US" sz="1150" dirty="0"/>
+            <a:endParaRPr lang="en-US" sz="1150" dirty="0">
+              <a:solidFill>
+                <a:srgbClr val="1E1E1E"/>
+              </a:solidFill>
+              <a:latin typeface="微软雅黑" charset="0"/>
+              <a:ea typeface="微软雅黑" charset="0"/>
+              <a:cs typeface="微软雅黑" charset="0"/>
+            </a:endParaRPr>
           </a:p>
         </p:txBody>
       </p:sp>
       <p:sp>
         <p:nvSpPr>
-          <p:cNvPr id="54" name="Shape 52"/>
-          <p:cNvSpPr/>
-          <p:nvPr/>
-        </p:nvSpPr>
-        <p:spPr>
-          <a:xfrm>
-            <a:off x="649224" y="5577840"/>
-            <a:ext cx="146304" cy="73152"/>
-          </a:xfrm>
-          <a:prstGeom prst="rect">
-            <a:avLst/>
-          </a:prstGeom>
-          <a:solidFill>
-            <a:srgbClr val="FFFFFF">
-              <a:alpha val="0"/>
-            </a:srgbClr>
-          </a:solidFill>
-          <a:ln w="13970">
-            <a:solidFill>
-              <a:srgbClr val="C60024"/>
-            </a:solidFill>
-            <a:prstDash val="solid"/>
-          </a:ln>
-        </p:spPr>
-      </p:sp>
-      <p:sp>
-        <p:nvSpPr>
-          <p:cNvPr id="55" name="Shape 53"/>
-          <p:cNvSpPr/>
-          <p:nvPr/>
-        </p:nvSpPr>
-        <p:spPr>
-          <a:xfrm>
-            <a:off x="612648" y="5632704"/>
-            <a:ext cx="310896" cy="182880"/>
-          </a:xfrm>
-          <a:prstGeom prst="roundRect">
-            <a:avLst>
-              <a:gd name="adj" fmla="val 15000"/>
-            </a:avLst>
-          </a:prstGeom>
-          <a:solidFill>
-            <a:srgbClr val="FFFFFF">
-              <a:alpha val="0"/>
-            </a:srgbClr>
-          </a:solidFill>
-          <a:ln w="13970">
-            <a:solidFill>
-              <a:srgbClr val="C60024"/>
-            </a:solidFill>
-            <a:prstDash val="solid"/>
-          </a:ln>
-        </p:spPr>
-      </p:sp>
-      <p:sp>
-        <p:nvSpPr>
-          <p:cNvPr id="56" name="Text 54"/>
-          <p:cNvSpPr/>
-          <p:nvPr/>
-        </p:nvSpPr>
-        <p:spPr>
-          <a:xfrm>
-            <a:off x="1088136" y="5559552"/>
-            <a:ext cx="146304" cy="201168"/>
-          </a:xfrm>
-          <a:prstGeom prst="rect">
-            <a:avLst/>
-          </a:prstGeom>
-          <a:noFill/>
-          <a:ln/>
+          <p:cNvPr id="57" name="Text 55"/>
+          <p:cNvSpPr/>
+          <p:nvPr/>
+        </p:nvSpPr>
+        <p:spPr>
+          <a:xfrm>
+            <a:off x="1152398" y="5858002"/>
+            <a:ext cx="2103120" cy="219456"/>
+          </a:xfrm>
+          <a:prstGeom prst="rect">
+            <a:avLst/>
+          </a:prstGeom>
+          <a:noFill/>
         </p:spPr>
         <p:txBody>
           <a:bodyPr wrap="square" lIns="0" tIns="0" rIns="0" bIns="0" rtlCol="0" anchor="ctr"/>
           <a:lstStyle/>
           <a:p>
-            <a:pPr indent="0" marL="0">
-              <a:buNone/>
-            </a:pPr>
-            <a:r>
-              <a:rPr lang="en-US" sz="1500" b="1" dirty="0">
-                <a:solidFill>
-                  <a:srgbClr val="C60024"/>
-                </a:solidFill>
-                <a:latin typeface="Arial" pitchFamily="34" charset="0"/>
-                <a:ea typeface="Arial" pitchFamily="34" charset="-122"/>
-                <a:cs typeface="Arial" pitchFamily="34" charset="-120"/>
-              </a:rPr>
-              <a:t>*</a:t>
-            </a:r>
-            <a:endParaRPr lang="en-US" sz="1500" dirty="0"/>
-          </a:p>
-        </p:txBody>
-      </p:sp>
-      <p:sp>
-        <p:nvSpPr>
-          <p:cNvPr id="57" name="Text 55"/>
-          <p:cNvSpPr/>
-          <p:nvPr/>
-        </p:nvSpPr>
-        <p:spPr>
-          <a:xfrm>
-            <a:off x="1298448" y="5559552"/>
-            <a:ext cx="2103120" cy="219456"/>
-          </a:xfrm>
-          <a:prstGeom prst="rect">
-            <a:avLst/>
-          </a:prstGeom>
-          <a:noFill/>
-          <a:ln/>
-        </p:spPr>
-        <p:txBody>
-          <a:bodyPr wrap="square" lIns="0" tIns="0" rIns="0" bIns="0" rtlCol="0" anchor="ctr"/>
-          <a:lstStyle/>
-          <a:p>
-            <a:pPr indent="0" marL="0">
+            <a:pPr marL="0" indent="0">
               <a:buNone/>
             </a:pPr>
             <a:r>
@@ -2641,13 +2284,20 @@
                 <a:solidFill>
                   <a:srgbClr val="1F4E79"/>
                 </a:solidFill>
-                <a:latin typeface="Arial" pitchFamily="34" charset="0"/>
-                <a:ea typeface="Arial" pitchFamily="34" charset="-122"/>
-                <a:cs typeface="Arial" pitchFamily="34" charset="-120"/>
+                <a:latin typeface="微软雅黑" charset="0"/>
+                <a:ea typeface="微软雅黑" charset="0"/>
+                <a:cs typeface="微软雅黑" charset="0"/>
               </a:rPr>
               <a:t>业务知识/</a:t>
             </a:r>
-            <a:endParaRPr lang="en-US" sz="1450" dirty="0"/>
+            <a:endParaRPr lang="en-US" sz="1450" b="1" dirty="0">
+              <a:solidFill>
+                <a:srgbClr val="1F4E79"/>
+              </a:solidFill>
+              <a:latin typeface="微软雅黑" charset="0"/>
+              <a:ea typeface="微软雅黑" charset="0"/>
+              <a:cs typeface="微软雅黑" charset="0"/>
+            </a:endParaRPr>
           </a:p>
         </p:txBody>
       </p:sp>
@@ -2659,7 +2309,7 @@
         </p:nvSpPr>
         <p:spPr>
           <a:xfrm>
-            <a:off x="1252728" y="5797296"/>
+            <a:off x="1106678" y="6095746"/>
             <a:ext cx="914" cy="100584"/>
           </a:xfrm>
           <a:prstGeom prst="line">
@@ -2682,7 +2332,7 @@
         </p:nvSpPr>
         <p:spPr>
           <a:xfrm>
-            <a:off x="1252728" y="5897880"/>
+            <a:off x="1106678" y="6196330"/>
             <a:ext cx="164592" cy="914"/>
           </a:xfrm>
           <a:prstGeom prst="line">
@@ -2705,20 +2355,19 @@
         </p:nvSpPr>
         <p:spPr>
           <a:xfrm>
-            <a:off x="1572768" y="5843016"/>
+            <a:off x="1262253" y="6141466"/>
             <a:ext cx="3712464" cy="164592"/>
           </a:xfrm>
           <a:prstGeom prst="rect">
             <a:avLst/>
           </a:prstGeom>
           <a:noFill/>
-          <a:ln/>
         </p:spPr>
         <p:txBody>
           <a:bodyPr wrap="square" lIns="0" tIns="0" rIns="0" bIns="0" rtlCol="0" anchor="ctr"/>
           <a:lstStyle/>
           <a:p>
-            <a:pPr indent="0" marL="0">
+            <a:pPr marL="0" indent="0">
               <a:buNone/>
             </a:pPr>
             <a:r>
@@ -2726,236 +2375,89 @@
                 <a:solidFill>
                   <a:srgbClr val="1F4E79"/>
                 </a:solidFill>
-                <a:latin typeface="Arial" pitchFamily="34" charset="0"/>
-                <a:ea typeface="Arial" pitchFamily="34" charset="-122"/>
-                <a:cs typeface="Arial" pitchFamily="34" charset="-120"/>
+                <a:latin typeface="微软雅黑" charset="0"/>
+                <a:ea typeface="微软雅黑" charset="0"/>
+                <a:cs typeface="微软雅黑" charset="0"/>
               </a:rPr>
               <a:t>领域术语 · 业务规则</a:t>
             </a:r>
-            <a:endParaRPr lang="en-US" sz="1150" dirty="0"/>
+            <a:endParaRPr lang="en-US" sz="1150" dirty="0">
+              <a:solidFill>
+                <a:srgbClr val="1F4E79"/>
+              </a:solidFill>
+              <a:latin typeface="微软雅黑" charset="0"/>
+              <a:ea typeface="微软雅黑" charset="0"/>
+              <a:cs typeface="微软雅黑" charset="0"/>
+            </a:endParaRPr>
           </a:p>
         </p:txBody>
       </p:sp>
       <p:sp>
         <p:nvSpPr>
-          <p:cNvPr id="61" name="Shape 59"/>
-          <p:cNvSpPr/>
-          <p:nvPr/>
-        </p:nvSpPr>
-        <p:spPr>
-          <a:xfrm>
-            <a:off x="5989320" y="1792224"/>
-            <a:ext cx="914" cy="914400"/>
-          </a:xfrm>
-          <a:prstGeom prst="line">
-            <a:avLst/>
-          </a:prstGeom>
-          <a:noFill/>
-          <a:ln w="11430">
-            <a:solidFill>
-              <a:srgbClr val="8F969D"/>
-            </a:solidFill>
-            <a:prstDash val="solid"/>
-          </a:ln>
-        </p:spPr>
-      </p:sp>
-      <p:sp>
-        <p:nvSpPr>
-          <p:cNvPr id="62" name="Shape 60"/>
-          <p:cNvSpPr/>
-          <p:nvPr/>
-        </p:nvSpPr>
-        <p:spPr>
-          <a:xfrm>
-            <a:off x="5989320" y="4133088"/>
-            <a:ext cx="914" cy="914400"/>
-          </a:xfrm>
-          <a:prstGeom prst="line">
-            <a:avLst/>
-          </a:prstGeom>
-          <a:noFill/>
-          <a:ln w="11430">
-            <a:solidFill>
-              <a:srgbClr val="8F969D"/>
-            </a:solidFill>
-            <a:prstDash val="solid"/>
-          </a:ln>
-        </p:spPr>
-      </p:sp>
-      <p:sp>
-        <p:nvSpPr>
-          <p:cNvPr id="63" name="Text 61"/>
-          <p:cNvSpPr/>
-          <p:nvPr/>
-        </p:nvSpPr>
-        <p:spPr>
-          <a:xfrm>
-            <a:off x="5806440" y="2807208"/>
-            <a:ext cx="365760" cy="1188720"/>
-          </a:xfrm>
-          <a:prstGeom prst="rect">
-            <a:avLst/>
-          </a:prstGeom>
-          <a:noFill/>
-          <a:ln/>
+          <p:cNvPr id="67" name="Text 65"/>
+          <p:cNvSpPr/>
+          <p:nvPr/>
+        </p:nvSpPr>
+        <p:spPr>
+          <a:xfrm>
+            <a:off x="3597148" y="6196711"/>
+            <a:ext cx="182880" cy="182880"/>
+          </a:xfrm>
+          <a:prstGeom prst="rect">
+            <a:avLst/>
+          </a:prstGeom>
+          <a:noFill/>
         </p:spPr>
         <p:txBody>
           <a:bodyPr wrap="square" lIns="0" tIns="0" rIns="0" bIns="0" rtlCol="0" anchor="ctr"/>
           <a:lstStyle/>
           <a:p>
-            <a:pPr algn="ctr" indent="0" marL="0">
+            <a:pPr marL="0" indent="0">
               <a:buNone/>
             </a:pPr>
             <a:r>
-              <a:rPr lang="en-US" sz="1600" b="1" dirty="0">
+              <a:rPr lang="en-US" sz="1600" dirty="0">
                 <a:solidFill>
-                  <a:srgbClr val="C60024"/>
+                  <a:srgbClr val="C69C3C"/>
                 </a:solidFill>
-                <a:latin typeface="Arial" pitchFamily="34" charset="0"/>
-                <a:ea typeface="Arial" pitchFamily="34" charset="-122"/>
-                <a:cs typeface="Arial" pitchFamily="34" charset="-120"/>
+                <a:latin typeface="微软雅黑" charset="0"/>
+                <a:ea typeface="微软雅黑" charset="0"/>
+                <a:cs typeface="Arial" panose="020B0604020202090204" pitchFamily="34" charset="-120"/>
               </a:rPr>
-              <a:t>知</a:t>
+              <a:t>★</a:t>
             </a:r>
-            <a:endParaRPr lang="en-US" sz="1600" dirty="0"/>
-          </a:p>
-          <a:p>
-            <a:pPr algn="ctr" indent="0" marL="0">
-              <a:buNone/>
-            </a:pPr>
-            <a:r>
-              <a:rPr lang="en-US" sz="1600" b="1" dirty="0">
-                <a:solidFill>
-                  <a:srgbClr val="C60024"/>
-                </a:solidFill>
-                <a:latin typeface="Arial" pitchFamily="34" charset="0"/>
-                <a:ea typeface="Arial" pitchFamily="34" charset="-122"/>
-                <a:cs typeface="Arial" pitchFamily="34" charset="-120"/>
-              </a:rPr>
-              <a:t>识</a:t>
-            </a:r>
-            <a:endParaRPr lang="en-US" sz="1600" dirty="0"/>
-          </a:p>
-          <a:p>
-            <a:pPr algn="ctr" indent="0" marL="0">
-              <a:buNone/>
-            </a:pPr>
-            <a:r>
-              <a:rPr lang="en-US" sz="1600" b="1" dirty="0">
-                <a:solidFill>
-                  <a:srgbClr val="C60024"/>
-                </a:solidFill>
-                <a:latin typeface="Arial" pitchFamily="34" charset="0"/>
-                <a:ea typeface="Arial" pitchFamily="34" charset="-122"/>
-                <a:cs typeface="Arial" pitchFamily="34" charset="-120"/>
-              </a:rPr>
-              <a:t>沉</a:t>
-            </a:r>
-            <a:endParaRPr lang="en-US" sz="1600" dirty="0"/>
-          </a:p>
-          <a:p>
-            <a:pPr algn="ctr" indent="0" marL="0">
-              <a:buNone/>
-            </a:pPr>
-            <a:r>
-              <a:rPr lang="en-US" sz="1600" b="1" dirty="0">
-                <a:solidFill>
-                  <a:srgbClr val="C60024"/>
-                </a:solidFill>
-                <a:latin typeface="Arial" pitchFamily="34" charset="0"/>
-                <a:ea typeface="Arial" pitchFamily="34" charset="-122"/>
-                <a:cs typeface="Arial" pitchFamily="34" charset="-120"/>
-              </a:rPr>
-              <a:t>淀</a:t>
-            </a:r>
-            <a:endParaRPr lang="en-US" sz="1600" dirty="0"/>
+            <a:endParaRPr lang="en-US" sz="1600" dirty="0">
+              <a:solidFill>
+                <a:srgbClr val="C69C3C"/>
+              </a:solidFill>
+              <a:latin typeface="微软雅黑" charset="0"/>
+              <a:ea typeface="微软雅黑" charset="0"/>
+              <a:cs typeface="Arial" panose="020B0604020202090204" pitchFamily="34" charset="-120"/>
+            </a:endParaRPr>
           </a:p>
         </p:txBody>
       </p:sp>
       <p:sp>
         <p:nvSpPr>
-          <p:cNvPr id="64" name="Shape 62"/>
-          <p:cNvSpPr/>
-          <p:nvPr/>
-        </p:nvSpPr>
-        <p:spPr>
-          <a:xfrm>
-            <a:off x="164592" y="6208776"/>
-            <a:ext cx="11868912" cy="914"/>
-          </a:xfrm>
-          <a:prstGeom prst="line">
-            <a:avLst/>
-          </a:prstGeom>
-          <a:noFill/>
-          <a:ln w="12700">
-            <a:solidFill>
-              <a:srgbClr val="C60024"/>
-            </a:solidFill>
-            <a:prstDash val="solid"/>
-          </a:ln>
-        </p:spPr>
-      </p:sp>
-      <p:sp>
-        <p:nvSpPr>
-          <p:cNvPr id="65" name="Text 63"/>
-          <p:cNvSpPr/>
-          <p:nvPr/>
-        </p:nvSpPr>
-        <p:spPr>
-          <a:xfrm>
-            <a:off x="859536" y="6400800"/>
-            <a:ext cx="128016" cy="182880"/>
-          </a:xfrm>
-          <a:prstGeom prst="rect">
-            <a:avLst/>
-          </a:prstGeom>
-          <a:noFill/>
-          <a:ln/>
+          <p:cNvPr id="68" name="Text 66"/>
+          <p:cNvSpPr/>
+          <p:nvPr/>
+        </p:nvSpPr>
+        <p:spPr>
+          <a:xfrm>
+            <a:off x="3880612" y="6224143"/>
+            <a:ext cx="1508760" cy="164592"/>
+          </a:xfrm>
+          <a:prstGeom prst="rect">
+            <a:avLst/>
+          </a:prstGeom>
+          <a:noFill/>
         </p:spPr>
         <p:txBody>
           <a:bodyPr wrap="square" lIns="0" tIns="0" rIns="0" bIns="0" rtlCol="0" anchor="ctr"/>
           <a:lstStyle/>
           <a:p>
-            <a:pPr indent="0" marL="0">
-              <a:buNone/>
-            </a:pPr>
-            <a:r>
-              <a:rPr lang="en-US" sz="1600" b="1" dirty="0">
-                <a:solidFill>
-                  <a:srgbClr val="C60024"/>
-                </a:solidFill>
-                <a:latin typeface="Arial" pitchFamily="34" charset="0"/>
-                <a:ea typeface="Arial" pitchFamily="34" charset="-122"/>
-                <a:cs typeface="Arial" pitchFamily="34" charset="-120"/>
-              </a:rPr>
-              <a:t>*</a:t>
-            </a:r>
-            <a:endParaRPr lang="en-US" sz="1600" dirty="0"/>
-          </a:p>
-        </p:txBody>
-      </p:sp>
-      <p:sp>
-        <p:nvSpPr>
-          <p:cNvPr id="66" name="Text 64"/>
-          <p:cNvSpPr/>
-          <p:nvPr/>
-        </p:nvSpPr>
-        <p:spPr>
-          <a:xfrm>
-            <a:off x="1078992" y="6419088"/>
-            <a:ext cx="1600200" cy="164592"/>
-          </a:xfrm>
-          <a:prstGeom prst="rect">
-            <a:avLst/>
-          </a:prstGeom>
-          <a:noFill/>
-          <a:ln/>
-        </p:spPr>
-        <p:txBody>
-          <a:bodyPr wrap="square" lIns="0" tIns="0" rIns="0" bIns="0" rtlCol="0" anchor="ctr"/>
-          <a:lstStyle/>
-          <a:p>
-            <a:pPr indent="0" marL="0">
+            <a:pPr marL="0" indent="0">
               <a:buNone/>
             </a:pPr>
             <a:r>
@@ -2963,178 +2465,233 @@
                 <a:solidFill>
                   <a:srgbClr val="1E1E1E"/>
                 </a:solidFill>
-                <a:latin typeface="Arial" pitchFamily="34" charset="0"/>
-                <a:ea typeface="Arial" pitchFamily="34" charset="-122"/>
-                <a:cs typeface="Arial" pitchFamily="34" charset="-120"/>
-              </a:rPr>
-              <a:t>开发、测试共同使用</a:t>
-            </a:r>
-            <a:endParaRPr lang="en-US" sz="1140" dirty="0"/>
-          </a:p>
-        </p:txBody>
-      </p:sp>
-      <p:sp>
-        <p:nvSpPr>
-          <p:cNvPr id="67" name="Text 65"/>
-          <p:cNvSpPr/>
-          <p:nvPr/>
-        </p:nvSpPr>
-        <p:spPr>
-          <a:xfrm>
-            <a:off x="3493008" y="6391656"/>
-            <a:ext cx="182880" cy="182880"/>
-          </a:xfrm>
-          <a:prstGeom prst="rect">
-            <a:avLst/>
-          </a:prstGeom>
-          <a:noFill/>
-          <a:ln/>
-        </p:spPr>
-        <p:txBody>
-          <a:bodyPr wrap="square" lIns="0" tIns="0" rIns="0" bIns="0" rtlCol="0" anchor="ctr"/>
-          <a:lstStyle/>
-          <a:p>
-            <a:pPr indent="0" marL="0">
-              <a:buNone/>
-            </a:pPr>
-            <a:r>
-              <a:rPr lang="en-US" sz="1600" dirty="0">
-                <a:solidFill>
-                  <a:srgbClr val="C69C3C"/>
-                </a:solidFill>
-                <a:latin typeface="Arial" pitchFamily="34" charset="0"/>
-                <a:ea typeface="Arial" pitchFamily="34" charset="-122"/>
-                <a:cs typeface="Arial" pitchFamily="34" charset="-120"/>
-              </a:rPr>
-              <a:t>★</a:t>
-            </a:r>
-            <a:endParaRPr lang="en-US" sz="1600" dirty="0"/>
-          </a:p>
-        </p:txBody>
-      </p:sp>
-      <p:sp>
-        <p:nvSpPr>
-          <p:cNvPr id="68" name="Text 66"/>
-          <p:cNvSpPr/>
-          <p:nvPr/>
-        </p:nvSpPr>
-        <p:spPr>
-          <a:xfrm>
-            <a:off x="3776472" y="6419088"/>
-            <a:ext cx="1508760" cy="164592"/>
-          </a:xfrm>
-          <a:prstGeom prst="rect">
-            <a:avLst/>
-          </a:prstGeom>
-          <a:noFill/>
-          <a:ln/>
-        </p:spPr>
-        <p:txBody>
-          <a:bodyPr wrap="square" lIns="0" tIns="0" rIns="0" bIns="0" rtlCol="0" anchor="ctr"/>
-          <a:lstStyle/>
-          <a:p>
-            <a:pPr indent="0" marL="0">
-              <a:buNone/>
-            </a:pPr>
-            <a:r>
-              <a:rPr lang="en-US" sz="1140" dirty="0">
-                <a:solidFill>
-                  <a:srgbClr val="1E1E1E"/>
-                </a:solidFill>
-                <a:latin typeface="Arial" pitchFamily="34" charset="0"/>
-                <a:ea typeface="Arial" pitchFamily="34" charset="-122"/>
-                <a:cs typeface="Arial" pitchFamily="34" charset="-120"/>
+                <a:latin typeface="微软雅黑" charset="0"/>
+                <a:ea typeface="微软雅黑" charset="0"/>
+                <a:cs typeface="Arial" panose="020B0604020202090204" pitchFamily="34" charset="-120"/>
               </a:rPr>
               <a:t>测试深度参与整理</a:t>
             </a:r>
-            <a:endParaRPr lang="en-US" sz="1140" dirty="0"/>
+            <a:endParaRPr lang="en-US" sz="1140" dirty="0">
+              <a:solidFill>
+                <a:srgbClr val="1E1E1E"/>
+              </a:solidFill>
+              <a:latin typeface="微软雅黑" charset="0"/>
+              <a:ea typeface="微软雅黑" charset="0"/>
+              <a:cs typeface="Arial" panose="020B0604020202090204" pitchFamily="34" charset="-120"/>
+            </a:endParaRPr>
           </a:p>
         </p:txBody>
       </p:sp>
-      <p:sp>
-        <p:nvSpPr>
-          <p:cNvPr id="69" name="Text 67"/>
-          <p:cNvSpPr/>
-          <p:nvPr/>
-        </p:nvSpPr>
-        <p:spPr>
-          <a:xfrm>
-            <a:off x="5650992" y="6409944"/>
-            <a:ext cx="73152" cy="164592"/>
-          </a:xfrm>
-          <a:prstGeom prst="rect">
-            <a:avLst/>
-          </a:prstGeom>
-          <a:noFill/>
-          <a:ln/>
-        </p:spPr>
-        <p:txBody>
-          <a:bodyPr wrap="square" lIns="0" tIns="0" rIns="0" bIns="0" rtlCol="0" anchor="ctr"/>
-          <a:lstStyle/>
-          <a:p>
-            <a:pPr indent="0" marL="0">
-              <a:buNone/>
-            </a:pPr>
-            <a:r>
-              <a:rPr lang="en-US" sz="1400" dirty="0">
-                <a:solidFill>
-                  <a:srgbClr val="1E1E1E"/>
-                </a:solidFill>
-                <a:latin typeface="Arial" pitchFamily="34" charset="0"/>
-                <a:ea typeface="Arial" pitchFamily="34" charset="-122"/>
-                <a:cs typeface="Arial" pitchFamily="34" charset="-120"/>
-              </a:rPr>
-              <a:t>|</a:t>
-            </a:r>
-            <a:endParaRPr lang="en-US" sz="1400" dirty="0"/>
-          </a:p>
-        </p:txBody>
-      </p:sp>
-      <p:sp>
-        <p:nvSpPr>
-          <p:cNvPr id="70" name="Text 68"/>
-          <p:cNvSpPr/>
-          <p:nvPr/>
-        </p:nvSpPr>
-        <p:spPr>
-          <a:xfrm>
-            <a:off x="6190488" y="6419088"/>
-            <a:ext cx="4114800" cy="164592"/>
-          </a:xfrm>
-          <a:prstGeom prst="rect">
-            <a:avLst/>
-          </a:prstGeom>
-          <a:noFill/>
-          <a:ln/>
-        </p:spPr>
-        <p:txBody>
-          <a:bodyPr wrap="square" lIns="0" tIns="0" rIns="0" bIns="0" rtlCol="0" anchor="ctr"/>
-          <a:lstStyle/>
-          <a:p>
-            <a:pPr indent="0" marL="0">
-              <a:buNone/>
-            </a:pPr>
-            <a:r>
-              <a:rPr lang="en-US" sz="1140" dirty="0">
-                <a:solidFill>
-                  <a:srgbClr val="1E1E1E"/>
-                </a:solidFill>
-                <a:latin typeface="Arial" pitchFamily="34" charset="0"/>
-                <a:ea typeface="Arial" pitchFamily="34" charset="-122"/>
-                <a:cs typeface="Arial" pitchFamily="34" charset="-120"/>
-              </a:rPr>
-              <a:t>统一沉淀于 docs/**，作为应用级可发布稳定资产</a:t>
-            </a:r>
-            <a:endParaRPr lang="en-US" sz="1140" dirty="0"/>
-          </a:p>
-        </p:txBody>
-      </p:sp>
+      <p:pic>
+        <p:nvPicPr>
+          <p:cNvPr id="206" name="Image 20" descr="/Users/kaka/Documents/Codex/2026-05-12/pptx-users-kaka-codex-skills-pptx/generated_assets/icon_folder_D40000.png"/>
+          <p:cNvPicPr>
+            <a:picLocks noChangeAspect="1"/>
+          </p:cNvPicPr>
+          <p:nvPr>
+            <p:custDataLst>
+              <p:tags r:id="rId1"/>
+            </p:custDataLst>
+          </p:nvPr>
+        </p:nvPicPr>
+        <p:blipFill>
+          <a:blip r:embed="rId2"/>
+          <a:stretch>
+            <a:fillRect/>
+          </a:stretch>
+        </p:blipFill>
+        <p:spPr>
+          <a:xfrm>
+            <a:off x="700405" y="2026920"/>
+            <a:ext cx="356235" cy="356235"/>
+          </a:xfrm>
+          <a:prstGeom prst="rect">
+            <a:avLst/>
+          </a:prstGeom>
+        </p:spPr>
+      </p:pic>
+      <p:pic>
+        <p:nvPicPr>
+          <p:cNvPr id="71" name="Image 20" descr="/Users/kaka/Documents/Codex/2026-05-12/pptx-users-kaka-codex-skills-pptx/generated_assets/icon_folder_D40000.png"/>
+          <p:cNvPicPr>
+            <a:picLocks noChangeAspect="1"/>
+          </p:cNvPicPr>
+          <p:nvPr>
+            <p:custDataLst>
+              <p:tags r:id="rId3"/>
+            </p:custDataLst>
+          </p:nvPr>
+        </p:nvPicPr>
+        <p:blipFill>
+          <a:blip r:embed="rId2"/>
+          <a:stretch>
+            <a:fillRect/>
+          </a:stretch>
+        </p:blipFill>
+        <p:spPr>
+          <a:xfrm>
+            <a:off x="700405" y="2884805"/>
+            <a:ext cx="356235" cy="356235"/>
+          </a:xfrm>
+          <a:prstGeom prst="rect">
+            <a:avLst/>
+          </a:prstGeom>
+        </p:spPr>
+      </p:pic>
+      <p:pic>
+        <p:nvPicPr>
+          <p:cNvPr id="72" name="Image 20" descr="/Users/kaka/Documents/Codex/2026-05-12/pptx-users-kaka-codex-skills-pptx/generated_assets/icon_folder_D40000.png"/>
+          <p:cNvPicPr>
+            <a:picLocks noChangeAspect="1"/>
+          </p:cNvPicPr>
+          <p:nvPr>
+            <p:custDataLst>
+              <p:tags r:id="rId4"/>
+            </p:custDataLst>
+          </p:nvPr>
+        </p:nvPicPr>
+        <p:blipFill>
+          <a:blip r:embed="rId2"/>
+          <a:stretch>
+            <a:fillRect/>
+          </a:stretch>
+        </p:blipFill>
+        <p:spPr>
+          <a:xfrm>
+            <a:off x="700405" y="3425825"/>
+            <a:ext cx="356235" cy="356235"/>
+          </a:xfrm>
+          <a:prstGeom prst="rect">
+            <a:avLst/>
+          </a:prstGeom>
+        </p:spPr>
+      </p:pic>
+      <p:pic>
+        <p:nvPicPr>
+          <p:cNvPr id="73" name="Image 20" descr="/Users/kaka/Documents/Codex/2026-05-12/pptx-users-kaka-codex-skills-pptx/generated_assets/icon_folder_D40000.png"/>
+          <p:cNvPicPr>
+            <a:picLocks noChangeAspect="1"/>
+          </p:cNvPicPr>
+          <p:nvPr>
+            <p:custDataLst>
+              <p:tags r:id="rId5"/>
+            </p:custDataLst>
+          </p:nvPr>
+        </p:nvPicPr>
+        <p:blipFill>
+          <a:blip r:embed="rId2"/>
+          <a:stretch>
+            <a:fillRect/>
+          </a:stretch>
+        </p:blipFill>
+        <p:spPr>
+          <a:xfrm>
+            <a:off x="700405" y="4422775"/>
+            <a:ext cx="356235" cy="356235"/>
+          </a:xfrm>
+          <a:prstGeom prst="rect">
+            <a:avLst/>
+          </a:prstGeom>
+        </p:spPr>
+      </p:pic>
+      <p:pic>
+        <p:nvPicPr>
+          <p:cNvPr id="74" name="Image 20" descr="/Users/kaka/Documents/Codex/2026-05-12/pptx-users-kaka-codex-skills-pptx/generated_assets/icon_folder_D40000.png"/>
+          <p:cNvPicPr>
+            <a:picLocks noChangeAspect="1"/>
+          </p:cNvPicPr>
+          <p:nvPr>
+            <p:custDataLst>
+              <p:tags r:id="rId6"/>
+            </p:custDataLst>
+          </p:nvPr>
+        </p:nvPicPr>
+        <p:blipFill>
+          <a:blip r:embed="rId2"/>
+          <a:stretch>
+            <a:fillRect/>
+          </a:stretch>
+        </p:blipFill>
+        <p:spPr>
+          <a:xfrm>
+            <a:off x="700405" y="4998720"/>
+            <a:ext cx="356235" cy="356235"/>
+          </a:xfrm>
+          <a:prstGeom prst="rect">
+            <a:avLst/>
+          </a:prstGeom>
+        </p:spPr>
+      </p:pic>
+      <p:pic>
+        <p:nvPicPr>
+          <p:cNvPr id="75" name="Image 20" descr="/Users/kaka/Documents/Codex/2026-05-12/pptx-users-kaka-codex-skills-pptx/generated_assets/icon_folder_D40000.png"/>
+          <p:cNvPicPr>
+            <a:picLocks noChangeAspect="1"/>
+          </p:cNvPicPr>
+          <p:nvPr>
+            <p:custDataLst>
+              <p:tags r:id="rId7"/>
+            </p:custDataLst>
+          </p:nvPr>
+        </p:nvPicPr>
+        <p:blipFill>
+          <a:blip r:embed="rId2"/>
+          <a:stretch>
+            <a:fillRect/>
+          </a:stretch>
+        </p:blipFill>
+        <p:spPr>
+          <a:xfrm>
+            <a:off x="700405" y="5702300"/>
+            <a:ext cx="356235" cy="356235"/>
+          </a:xfrm>
+          <a:prstGeom prst="rect">
+            <a:avLst/>
+          </a:prstGeom>
+        </p:spPr>
+      </p:pic>
     </p:spTree>
   </p:cSld>
   <p:clrMapOvr>
     <a:masterClrMapping/>
   </p:clrMapOvr>
 </p:sld>
+</file>
+
+<file path=ppt/tags/tag1.xml><?xml version="1.0" encoding="utf-8"?>
+<p:tagLst xmlns:p="http://schemas.openxmlformats.org/presentationml/2006/main">
+  <p:tag name="KSO_WM_BEAUTIFY_FLAG" val=""/>
+</p:tagLst>
+</file>
+
+<file path=ppt/tags/tag2.xml><?xml version="1.0" encoding="utf-8"?>
+<p:tagLst xmlns:p="http://schemas.openxmlformats.org/presentationml/2006/main">
+  <p:tag name="KSO_WM_BEAUTIFY_FLAG" val=""/>
+</p:tagLst>
+</file>
+
+<file path=ppt/tags/tag3.xml><?xml version="1.0" encoding="utf-8"?>
+<p:tagLst xmlns:p="http://schemas.openxmlformats.org/presentationml/2006/main">
+  <p:tag name="KSO_WM_BEAUTIFY_FLAG" val=""/>
+</p:tagLst>
+</file>
+
+<file path=ppt/tags/tag4.xml><?xml version="1.0" encoding="utf-8"?>
+<p:tagLst xmlns:p="http://schemas.openxmlformats.org/presentationml/2006/main">
+  <p:tag name="KSO_WM_BEAUTIFY_FLAG" val=""/>
+</p:tagLst>
+</file>
+
+<file path=ppt/tags/tag5.xml><?xml version="1.0" encoding="utf-8"?>
+<p:tagLst xmlns:p="http://schemas.openxmlformats.org/presentationml/2006/main">
+  <p:tag name="KSO_WM_BEAUTIFY_FLAG" val=""/>
+</p:tagLst>
+</file>
+
+<file path=ppt/tags/tag6.xml><?xml version="1.0" encoding="utf-8"?>
+<p:tagLst xmlns:p="http://schemas.openxmlformats.org/presentationml/2006/main">
+  <p:tag name="KSO_WM_BEAUTIFY_FLAG" val=""/>
+</p:tagLst>
 </file>
 
 <file path=ppt/theme/theme1.xml><?xml version="1.0" encoding="utf-8"?>
@@ -3180,7 +2737,7 @@
     </a:clrScheme>
     <a:fontScheme name="Office">
       <a:majorFont>
-        <a:latin typeface="Calibri Light" panose="020F0302020204030204"/>
+        <a:latin typeface="Calibri Light"/>
         <a:ea typeface=""/>
         <a:cs typeface=""/>
         <a:font script="Jpan" typeface="游ゴシック Light"/>
@@ -3213,26 +2770,9 @@
         <a:font script="Viet" typeface="Times New Roman"/>
         <a:font script="Uigh" typeface="Microsoft Uighur"/>
         <a:font script="Geor" typeface="Sylfaen"/>
-        <a:font script="Armn" typeface="Arial"/>
-        <a:font script="Bugi" typeface="Leelawadee UI"/>
-        <a:font script="Bopo" typeface="Microsoft JhengHei"/>
-        <a:font script="Java" typeface="Javanese Text"/>
-        <a:font script="Lisu" typeface="Segoe UI"/>
-        <a:font script="Mymr" typeface="Myanmar Text"/>
-        <a:font script="Nkoo" typeface="Ebrima"/>
-        <a:font script="Olck" typeface="Nirmala UI"/>
-        <a:font script="Osma" typeface="Ebrima"/>
-        <a:font script="Phag" typeface="Phagspa"/>
-        <a:font script="Syrn" typeface="Estrangelo Edessa"/>
-        <a:font script="Syrj" typeface="Estrangelo Edessa"/>
-        <a:font script="Syre" typeface="Estrangelo Edessa"/>
-        <a:font script="Sora" typeface="Nirmala UI"/>
-        <a:font script="Tale" typeface="Microsoft Tai Le"/>
-        <a:font script="Talu" typeface="Microsoft New Tai Lue"/>
-        <a:font script="Tfng" typeface="Ebrima"/>
       </a:majorFont>
       <a:minorFont>
-        <a:latin typeface="Calibri" panose="020F0502020204030204"/>
+        <a:latin typeface="Calibri"/>
         <a:ea typeface=""/>
         <a:cs typeface=""/>
         <a:font script="Jpan" typeface="游ゴシック"/>
@@ -3265,23 +2805,6 @@
         <a:font script="Viet" typeface="Arial"/>
         <a:font script="Uigh" typeface="Microsoft Uighur"/>
         <a:font script="Geor" typeface="Sylfaen"/>
-        <a:font script="Armn" typeface="Arial"/>
-        <a:font script="Bugi" typeface="Leelawadee UI"/>
-        <a:font script="Bopo" typeface="Microsoft JhengHei"/>
-        <a:font script="Java" typeface="Javanese Text"/>
-        <a:font script="Lisu" typeface="Segoe UI"/>
-        <a:font script="Mymr" typeface="Myanmar Text"/>
-        <a:font script="Nkoo" typeface="Ebrima"/>
-        <a:font script="Olck" typeface="Nirmala UI"/>
-        <a:font script="Osma" typeface="Ebrima"/>
-        <a:font script="Phag" typeface="Phagspa"/>
-        <a:font script="Syrn" typeface="Estrangelo Edessa"/>
-        <a:font script="Syrj" typeface="Estrangelo Edessa"/>
-        <a:font script="Syre" typeface="Estrangelo Edessa"/>
-        <a:font script="Sora" typeface="Nirmala UI"/>
-        <a:font script="Tale" typeface="Microsoft Tai Le"/>
-        <a:font script="Talu" typeface="Microsoft New Tai Lue"/>
-        <a:font script="Tfng" typeface="Ebrima"/>
       </a:minorFont>
     </a:fontScheme>
     <a:fmtScheme name="Office">
@@ -3422,8 +2945,265 @@
       </a:bgFillStyleLst>
     </a:fmtScheme>
   </a:themeElements>
-  <a:objectDefaults/>
-  <a:extraClrSchemeLst/>
+  <a:extLst>
+    <a:ext uri="{05A4C25C-085E-4340-85A3-A5531E510DB2}">
+      <thm15:themeFamily xmlns:thm15="http://schemas.microsoft.com/office/thememl/2012/main" name="Office Theme" id="{62F939B6-93AF-4DB8-9C6B-D6C7DFDC589F}" vid="{4A3C46E8-61CC-4603-A589-7422A47A8E4A}"/>
+    </a:ext>
+  </a:extLst>
+</a:theme>
+</file>
+
+<file path=ppt/theme/theme2.xml><?xml version="1.0" encoding="utf-8"?>
+<a:theme xmlns:a="http://schemas.openxmlformats.org/drawingml/2006/main" name="Office Theme">
+  <a:themeElements>
+    <a:clrScheme name="Office">
+      <a:dk1>
+        <a:sysClr val="windowText" lastClr="000000"/>
+      </a:dk1>
+      <a:lt1>
+        <a:sysClr val="window" lastClr="FFFFFF"/>
+      </a:lt1>
+      <a:dk2>
+        <a:srgbClr val="44546A"/>
+      </a:dk2>
+      <a:lt2>
+        <a:srgbClr val="E7E6E6"/>
+      </a:lt2>
+      <a:accent1>
+        <a:srgbClr val="4472C4"/>
+      </a:accent1>
+      <a:accent2>
+        <a:srgbClr val="ED7D31"/>
+      </a:accent2>
+      <a:accent3>
+        <a:srgbClr val="A5A5A5"/>
+      </a:accent3>
+      <a:accent4>
+        <a:srgbClr val="FFC000"/>
+      </a:accent4>
+      <a:accent5>
+        <a:srgbClr val="5B9BD5"/>
+      </a:accent5>
+      <a:accent6>
+        <a:srgbClr val="70AD47"/>
+      </a:accent6>
+      <a:hlink>
+        <a:srgbClr val="0563C1"/>
+      </a:hlink>
+      <a:folHlink>
+        <a:srgbClr val="954F72"/>
+      </a:folHlink>
+    </a:clrScheme>
+    <a:fontScheme name="Office">
+      <a:majorFont>
+        <a:latin typeface="Calibri Light"/>
+        <a:ea typeface=""/>
+        <a:cs typeface=""/>
+        <a:font script="Jpan" typeface="游ゴシック Light"/>
+        <a:font script="Hang" typeface="맑은 고딕"/>
+        <a:font script="Hans" typeface="等线 Light"/>
+        <a:font script="Hant" typeface="新細明體"/>
+        <a:font script="Arab" typeface="Times New Roman"/>
+        <a:font script="Hebr" typeface="Times New Roman"/>
+        <a:font script="Thai" typeface="Angsana New"/>
+        <a:font script="Ethi" typeface="Nyala"/>
+        <a:font script="Beng" typeface="Vrinda"/>
+        <a:font script="Gujr" typeface="Shruti"/>
+        <a:font script="Khmr" typeface="MoolBoran"/>
+        <a:font script="Knda" typeface="Tunga"/>
+        <a:font script="Guru" typeface="Raavi"/>
+        <a:font script="Cans" typeface="Euphemia"/>
+        <a:font script="Cher" typeface="Plantagenet Cherokee"/>
+        <a:font script="Yiii" typeface="Microsoft Yi Baiti"/>
+        <a:font script="Tibt" typeface="Microsoft Himalaya"/>
+        <a:font script="Thaa" typeface="MV Boli"/>
+        <a:font script="Deva" typeface="Mangal"/>
+        <a:font script="Telu" typeface="Gautami"/>
+        <a:font script="Taml" typeface="Latha"/>
+        <a:font script="Syrc" typeface="Estrangelo Edessa"/>
+        <a:font script="Orya" typeface="Kalinga"/>
+        <a:font script="Mlym" typeface="Kartika"/>
+        <a:font script="Laoo" typeface="DokChampa"/>
+        <a:font script="Sinh" typeface="Iskoola Pota"/>
+        <a:font script="Mong" typeface="Mongolian Baiti"/>
+        <a:font script="Viet" typeface="Times New Roman"/>
+        <a:font script="Uigh" typeface="Microsoft Uighur"/>
+        <a:font script="Geor" typeface="Sylfaen"/>
+      </a:majorFont>
+      <a:minorFont>
+        <a:latin typeface="Calibri"/>
+        <a:ea typeface=""/>
+        <a:cs typeface=""/>
+        <a:font script="Jpan" typeface="游ゴシック"/>
+        <a:font script="Hang" typeface="맑은 고딕"/>
+        <a:font script="Hans" typeface="等线"/>
+        <a:font script="Hant" typeface="新細明體"/>
+        <a:font script="Arab" typeface="Arial"/>
+        <a:font script="Hebr" typeface="Arial"/>
+        <a:font script="Thai" typeface="Cordia New"/>
+        <a:font script="Ethi" typeface="Nyala"/>
+        <a:font script="Beng" typeface="Vrinda"/>
+        <a:font script="Gujr" typeface="Shruti"/>
+        <a:font script="Khmr" typeface="DaunPenh"/>
+        <a:font script="Knda" typeface="Tunga"/>
+        <a:font script="Guru" typeface="Raavi"/>
+        <a:font script="Cans" typeface="Euphemia"/>
+        <a:font script="Cher" typeface="Plantagenet Cherokee"/>
+        <a:font script="Yiii" typeface="Microsoft Yi Baiti"/>
+        <a:font script="Tibt" typeface="Microsoft Himalaya"/>
+        <a:font script="Thaa" typeface="MV Boli"/>
+        <a:font script="Deva" typeface="Mangal"/>
+        <a:font script="Telu" typeface="Gautami"/>
+        <a:font script="Taml" typeface="Latha"/>
+        <a:font script="Syrc" typeface="Estrangelo Edessa"/>
+        <a:font script="Orya" typeface="Kalinga"/>
+        <a:font script="Mlym" typeface="Kartika"/>
+        <a:font script="Laoo" typeface="DokChampa"/>
+        <a:font script="Sinh" typeface="Iskoola Pota"/>
+        <a:font script="Mong" typeface="Mongolian Baiti"/>
+        <a:font script="Viet" typeface="Arial"/>
+        <a:font script="Uigh" typeface="Microsoft Uighur"/>
+        <a:font script="Geor" typeface="Sylfaen"/>
+      </a:minorFont>
+    </a:fontScheme>
+    <a:fmtScheme name="Office">
+      <a:fillStyleLst>
+        <a:solidFill>
+          <a:schemeClr val="phClr"/>
+        </a:solidFill>
+        <a:gradFill rotWithShape="1">
+          <a:gsLst>
+            <a:gs pos="0">
+              <a:schemeClr val="phClr">
+                <a:lumMod val="110000"/>
+                <a:satMod val="105000"/>
+                <a:tint val="67000"/>
+              </a:schemeClr>
+            </a:gs>
+            <a:gs pos="50000">
+              <a:schemeClr val="phClr">
+                <a:lumMod val="105000"/>
+                <a:satMod val="103000"/>
+                <a:tint val="73000"/>
+              </a:schemeClr>
+            </a:gs>
+            <a:gs pos="100000">
+              <a:schemeClr val="phClr">
+                <a:lumMod val="105000"/>
+                <a:satMod val="109000"/>
+                <a:tint val="81000"/>
+              </a:schemeClr>
+            </a:gs>
+          </a:gsLst>
+          <a:lin ang="5400000" scaled="0"/>
+        </a:gradFill>
+        <a:gradFill rotWithShape="1">
+          <a:gsLst>
+            <a:gs pos="0">
+              <a:schemeClr val="phClr">
+                <a:satMod val="103000"/>
+                <a:lumMod val="102000"/>
+                <a:tint val="94000"/>
+              </a:schemeClr>
+            </a:gs>
+            <a:gs pos="50000">
+              <a:schemeClr val="phClr">
+                <a:satMod val="110000"/>
+                <a:lumMod val="100000"/>
+                <a:shade val="100000"/>
+              </a:schemeClr>
+            </a:gs>
+            <a:gs pos="100000">
+              <a:schemeClr val="phClr">
+                <a:lumMod val="99000"/>
+                <a:satMod val="120000"/>
+                <a:shade val="78000"/>
+              </a:schemeClr>
+            </a:gs>
+          </a:gsLst>
+          <a:lin ang="5400000" scaled="0"/>
+        </a:gradFill>
+      </a:fillStyleLst>
+      <a:lnStyleLst>
+        <a:ln w="6350" cap="flat" cmpd="sng" algn="ctr">
+          <a:solidFill>
+            <a:schemeClr val="phClr"/>
+          </a:solidFill>
+          <a:prstDash val="solid"/>
+          <a:miter lim="800000"/>
+        </a:ln>
+        <a:ln w="12700" cap="flat" cmpd="sng" algn="ctr">
+          <a:solidFill>
+            <a:schemeClr val="phClr"/>
+          </a:solidFill>
+          <a:prstDash val="solid"/>
+          <a:miter lim="800000"/>
+        </a:ln>
+        <a:ln w="19050" cap="flat" cmpd="sng" algn="ctr">
+          <a:solidFill>
+            <a:schemeClr val="phClr"/>
+          </a:solidFill>
+          <a:prstDash val="solid"/>
+          <a:miter lim="800000"/>
+        </a:ln>
+      </a:lnStyleLst>
+      <a:effectStyleLst>
+        <a:effectStyle>
+          <a:effectLst/>
+        </a:effectStyle>
+        <a:effectStyle>
+          <a:effectLst/>
+        </a:effectStyle>
+        <a:effectStyle>
+          <a:effectLst>
+            <a:outerShdw blurRad="57150" dist="19050" dir="5400000" algn="ctr" rotWithShape="0">
+              <a:srgbClr val="000000">
+                <a:alpha val="63000"/>
+              </a:srgbClr>
+            </a:outerShdw>
+          </a:effectLst>
+        </a:effectStyle>
+      </a:effectStyleLst>
+      <a:bgFillStyleLst>
+        <a:solidFill>
+          <a:schemeClr val="phClr"/>
+        </a:solidFill>
+        <a:solidFill>
+          <a:schemeClr val="phClr">
+            <a:tint val="95000"/>
+            <a:satMod val="170000"/>
+          </a:schemeClr>
+        </a:solidFill>
+        <a:gradFill rotWithShape="1">
+          <a:gsLst>
+            <a:gs pos="0">
+              <a:schemeClr val="phClr">
+                <a:tint val="93000"/>
+                <a:satMod val="150000"/>
+                <a:shade val="98000"/>
+                <a:lumMod val="102000"/>
+              </a:schemeClr>
+            </a:gs>
+            <a:gs pos="50000">
+              <a:schemeClr val="phClr">
+                <a:tint val="98000"/>
+                <a:satMod val="130000"/>
+                <a:shade val="90000"/>
+                <a:lumMod val="103000"/>
+              </a:schemeClr>
+            </a:gs>
+            <a:gs pos="100000">
+              <a:schemeClr val="phClr">
+                <a:shade val="63000"/>
+                <a:satMod val="120000"/>
+              </a:schemeClr>
+            </a:gs>
+          </a:gsLst>
+          <a:lin ang="5400000" scaled="0"/>
+        </a:gradFill>
+      </a:bgFillStyleLst>
+    </a:fmtScheme>
+  </a:themeElements>
   <a:extLst>
     <a:ext uri="{05A4C25C-085E-4340-85A3-A5531E510DB2}">
       <thm15:themeFamily xmlns:thm15="http://schemas.microsoft.com/office/thememl/2012/main" name="Office Theme" id="{62F939B6-93AF-4DB8-9C6B-D6C7DFDC589F}" vid="{4A3C46E8-61CC-4603-A589-7422A47A8E4A}"/>
